--- a/references/Apresentacao_RAG_2026-06-01.pptx
+++ b/references/Apresentacao_RAG_2026-06-01.pptx
@@ -2333,7 +2333,7 @@
                 <a:latin typeface="Consolas"/>
                 <a:cs typeface="Consolas"/>
               </a:rPr>
-              <a:t>JUNHO 2026</a:t>
+              <a:t>JUN 2026</a:t>
             </a:r>
             <a:r>
               <a:rPr sz="900" b="1" spc="180" dirty="0">
@@ -2485,7 +2485,7 @@
                 <a:latin typeface="Georgia"/>
                 <a:cs typeface="Georgia"/>
               </a:rPr>
-              <a:t>Stack de RAG para</a:t>
+              <a:t>Stack de RAG</a:t>
             </a:r>
             <a:r>
               <a:rPr sz="8700" b="1" spc="-25" dirty="0">
@@ -2536,7 +2536,7 @@
                 <a:latin typeface="Georgia"/>
                 <a:cs typeface="Georgia"/>
               </a:rPr>
-              <a:t>relatórios de inspeção.</a:t>
+              <a:t>para inspeção.</a:t>
             </a:r>
             <a:r>
               <a:rPr sz="8700" b="1" spc="-200" dirty="0">
@@ -2580,7 +2580,7 @@
                 <a:latin typeface="Segoe UI"/>
                 <a:cs typeface="Segoe UI"/>
               </a:rPr>
-              <a:t>ChromaDB local versus OpenAI Embeddings + API. Levantamento técnico para definir embedder, vector store e LLM gerador, com pipeline de ingestão contínua para os novos laudos.</a:t>
+              <a:t>ChromaDB local vs. OpenAI Embeddings. Embedder, vector store, LLM e ingestão contínua.</a:t>
             </a:r>
             <a:r>
               <a:rPr sz="2100" spc="-25" dirty="0">
@@ -4147,7 +4147,7 @@
                 <a:latin typeface="Consolas"/>
                 <a:cs typeface="Consolas"/>
               </a:rPr>
-              <a:t>ANÁLISE TÉCNICA  /  16 : 9</a:t>
+              <a:t>ANÁLISE  /  16 : 9</a:t>
             </a:r>
             <a:r>
               <a:rPr sz="950" b="1" spc="235" dirty="0">
@@ -4346,7 +4346,7 @@
                 <a:latin typeface="Consolas"/>
                 <a:cs typeface="Consolas"/>
               </a:rPr>
-              <a:t>CORPUS REAL</a:t>
+              <a:t>CORPUS</a:t>
             </a:r>
             <a:r>
               <a:rPr sz="1100" b="1" spc="290" dirty="0">
@@ -4432,7 +4432,7 @@
                 <a:latin typeface="Georgia"/>
                 <a:cs typeface="Georgia"/>
               </a:rPr>
-              <a:t>78 laudos e 7.943 captions</a:t>
+              <a:t>78 laudos</a:t>
             </a:r>
             <a:r>
               <a:rPr sz="3450" b="1" spc="-10" dirty="0">
@@ -4466,7 +4466,7 @@
                 <a:latin typeface="Georgia"/>
                 <a:cs typeface="Georgia"/>
               </a:rPr>
-              <a:t>compõem o corpus inicial.</a:t>
+              <a:t>+ 7.943 captions.</a:t>
             </a:r>
             <a:r>
               <a:rPr sz="3450" b="1" spc="-120" dirty="0">
@@ -4849,7 +4849,7 @@
                 <a:latin typeface="Consolas"/>
                 <a:cs typeface="Consolas"/>
               </a:rPr>
-              <a:t>Coleção report_texts</a:t>
+              <a:t>report_texts</a:t>
             </a:r>
             <a:r>
               <a:rPr sz="950" b="1" spc="229" dirty="0">
@@ -4915,7 +4915,7 @@
                 <a:latin typeface="Georgia"/>
                 <a:cs typeface="Georgia"/>
               </a:rPr>
-              <a:t>78 chunks — uma seção por laudo.</a:t>
+              <a:t>78 chunks — um por laudo.</a:t>
             </a:r>
             <a:r>
               <a:rPr sz="2850" b="1" dirty="0">
@@ -4989,7 +4989,7 @@
                 <a:latin typeface="Segoe UI"/>
                 <a:cs typeface="Segoe UI"/>
               </a:rPr>
-              <a:t>Cada chunk corresponde à seção “Discussão dos Resultados” de um relatório. Tamanho médio de 400 tokens. Todos do tipo Análise de Falha; cliente predominante PETROBRÁS.</a:t>
+              <a:t>Seção “Discussão dos Resultados”. ~400 tokens por chunk. 100 % Análise de Falha PETROBRÁS.</a:t>
             </a:r>
             <a:r>
               <a:rPr sz="1650" spc="-55" dirty="0">
@@ -5552,7 +5552,7 @@
                 <a:latin typeface="Consolas"/>
                 <a:cs typeface="Consolas"/>
               </a:rPr>
-              <a:t>Coleção metallography_captions</a:t>
+              <a:t>captions</a:t>
             </a:r>
             <a:r>
               <a:rPr sz="950" b="1" spc="215" dirty="0">
@@ -5662,7 +5662,7 @@
                 <a:latin typeface="Georgia"/>
                 <a:cs typeface="Georgia"/>
               </a:rPr>
-              <a:t>de imagens de metalografia.</a:t>
+              <a:t>de metalografia.</a:t>
             </a:r>
             <a:r>
               <a:rPr sz="2850" b="1" spc="-55" dirty="0">
@@ -5776,7 +5776,7 @@
                 <a:latin typeface="Segoe UI"/>
                 <a:cs typeface="Segoe UI"/>
               </a:rPr>
-              <a:t>Aproximadamente cem captions por laudo. Suporta consultas semânticas quando a resposta está na imagem, não no texto principal do relatório.</a:t>
+              <a:t>~100 captions por laudo. Atende consultas onde a resposta está na imagem, não no texto.</a:t>
             </a:r>
             <a:r>
               <a:rPr sz="1650" spc="-50" dirty="0">
@@ -7460,7 +7460,7 @@
                 <a:latin typeface="Georgia"/>
                 <a:cs typeface="Georgia"/>
               </a:rPr>
-              <a:t>Cada novo laudo deve ficar disponível para busca em até um minuto.</a:t>
+              <a:t>Novo laudo buscável em &lt; 1 minuto.</a:t>
             </a:r>
             <a:r>
               <a:rPr sz="3450" b="1" spc="-45" dirty="0">
@@ -7748,7 +7748,7 @@
                 <a:latin typeface="Segoe UI"/>
                 <a:cs typeface="Segoe UI"/>
               </a:rPr>
-              <a:t>O endpoint report-generate finaliza o DOCX e emite um evento de conclusão.</a:t>
+              <a:t>report-generate finaliza o DOCX e emite evento.</a:t>
             </a:r>
             <a:r>
               <a:rPr sz="1650" spc="-50" dirty="0">
@@ -7996,7 +7996,7 @@
                 <a:latin typeface="Segoe UI"/>
                 <a:cs typeface="Segoe UI"/>
               </a:rPr>
-              <a:t>A mensagem entra na fila (pg-boss sobre o Postgres já existente).</a:t>
+              <a:t>Fila no Postgres existente (pg-boss).</a:t>
             </a:r>
             <a:r>
               <a:rPr sz="1650" spc="-55" dirty="0">
@@ -8274,7 +8274,7 @@
                 <a:latin typeface="Segoe UI"/>
                 <a:cs typeface="Segoe UI"/>
               </a:rPr>
-              <a:t>O worker extrai texto, gera embeddings e faz upsert idempotente no Chroma.</a:t>
+              <a:t>Worker embeda e faz upsert idempotente.</a:t>
             </a:r>
             <a:r>
               <a:rPr sz="1650" spc="-60" dirty="0">
@@ -8552,7 +8552,7 @@
                 <a:latin typeface="Segoe UI"/>
                 <a:cs typeface="Segoe UI"/>
               </a:rPr>
-              <a:t>A coleção é atualizada; a busca semântica já enxerga o novo laudo.</a:t>
+              <a:t>Coleção atualizada; busca enxerga o laudo.</a:t>
             </a:r>
             <a:r>
               <a:rPr sz="1650" spc="-50" dirty="0">
@@ -10781,7 +10781,7 @@
                 <a:latin typeface="Georgia"/>
                 <a:cs typeface="Georgia"/>
               </a:rPr>
-              <a:t>Aprovar a liberação de rede e o gate de migração.</a:t>
+              <a:t>Liberar a TI.</a:t>
             </a:r>
             <a:r>
               <a:rPr sz="8700" b="1" spc="-395" dirty="0">
@@ -10845,7 +10845,7 @@
                 <a:latin typeface="Segoe UI"/>
                 <a:cs typeface="Segoe UI"/>
               </a:rPr>
-              <a:t>Com a TI liberada, completamos V1a, V1b, V2, V3 e V4 em uma tarde. Sem isso, a decisão de stack fica travada no piso do TF-IDF.</a:t>
+              <a:t>Com a rede liberada, o bench neural sai em uma tarde. Sem ela, a stack fica travada no piso do TF-IDF.</a:t>
             </a:r>
             <a:r>
               <a:rPr sz="2100" spc="-20" dirty="0">
@@ -12436,7 +12436,7 @@
                 <a:latin typeface="Consolas"/>
                 <a:cs typeface="Consolas"/>
               </a:rPr>
-              <a:t>BUG DETECTADO</a:t>
+              <a:t>MISMATCH</a:t>
             </a:r>
             <a:endParaRPr sz="1100">
               <a:latin typeface="Consolas"/>
@@ -12482,7 +12482,7 @@
                 <a:latin typeface="Georgia"/>
                 <a:cs typeface="Georgia"/>
               </a:rPr>
-              <a:t>O índice e a consulta usam</a:t>
+              <a:t>Índice e consulta</a:t>
             </a:r>
             <a:r>
               <a:rPr sz="5400" b="1" spc="-75" dirty="0">
@@ -12563,7 +12563,7 @@
                 <a:latin typeface="Georgia"/>
                 <a:cs typeface="Georgia"/>
               </a:rPr>
-              <a:t>modelos diferentes.</a:t>
+              <a:t>usam modelos diferentes.</a:t>
             </a:r>
             <a:r>
               <a:rPr sz="5400" b="1" spc="-75" dirty="0">
@@ -12607,7 +12607,7 @@
                 <a:latin typeface="Segoe UI"/>
                 <a:cs typeface="Segoe UI"/>
               </a:rPr>
-              <a:t>A coleção report_texts foi criada com um sentence-transformer fine-tunado pelo time, mas o serviço NestJS aplica Xenova/MPNet vanilla em cada consulta.</a:t>
+              <a:t>Resultado: espaços vetoriais incompatíveis em produção.</a:t>
             </a:r>
             <a:r>
               <a:rPr sz="2100" spc="-10" dirty="0">
@@ -13560,7 +13560,7 @@
                 <a:latin typeface="Segoe UI"/>
                 <a:cs typeface="Segoe UI"/>
               </a:rPr>
-              <a:t>models/fine_tuned_report_model — sentence-transformer fine-tunado (768 dim). Ativo do ml_wo; não está versionado no repositório.</a:t>
+              <a:t>fine_tuned_report_model — 768 dim. Fora do repositório.</a:t>
             </a:r>
             <a:r>
               <a:rPr sz="1650" spc="-45" dirty="0">
@@ -14607,7 +14607,7 @@
                 <a:latin typeface="Georgia"/>
                 <a:cs typeface="Georgia"/>
               </a:rPr>
-              <a:t>Query</a:t>
+              <a:t>Consulta</a:t>
             </a:r>
             <a:endParaRPr sz="2250">
               <a:latin typeface="Georgia"/>
@@ -14631,7 +14631,7 @@
                 <a:latin typeface="Segoe UI"/>
                 <a:cs typeface="Segoe UI"/>
               </a:rPr>
-              <a:t>Xenova/paraphrase-multilingual-mpnet-base-v2 — MPNet vanilla em ONNX no Node (768 dim). Aplicado a cada consulta de produção.</a:t>
+              <a:t>Xenova/MPNet vanilla em ONNX — 768 dim. Aplicado em cada chamada.</a:t>
             </a:r>
             <a:r>
               <a:rPr sz="1650" spc="-35" dirty="0">
@@ -15683,7 +15683,7 @@
                 <a:latin typeface="Segoe UI"/>
                 <a:cs typeface="Segoe UI"/>
               </a:rPr>
-              <a:t>Os espaços vetoriais são incompatíveis. O recall do retrieval atual está abaixo do potencial real, e o efeito só será mensurável depois do bench.</a:t>
+              <a:t>Recall degradado. Magnitude só será medida no bench neural.</a:t>
             </a:r>
             <a:r>
               <a:rPr sz="1650" spc="-10" dirty="0">
@@ -17290,7 +17290,7 @@
                 <a:latin typeface="Georgia"/>
                 <a:cs typeface="Georgia"/>
               </a:rPr>
-              <a:t>Store medido em produção,</a:t>
+              <a:t>Embedder estimado;</a:t>
             </a:r>
             <a:r>
               <a:rPr sz="3450" b="1" spc="-10" dirty="0">
@@ -17324,7 +17324,7 @@
                 <a:latin typeface="Georgia"/>
                 <a:cs typeface="Georgia"/>
               </a:rPr>
-              <a:t>embedder estimado.</a:t>
+              <a:t>store medido.</a:t>
             </a:r>
             <a:r>
               <a:rPr sz="3450" b="1" spc="-120" dirty="0">
@@ -17773,7 +17773,7 @@
                 <a:latin typeface="Georgia"/>
                 <a:cs typeface="Georgia"/>
               </a:rPr>
-              <a:t>Embedder e LLM dominam o pipeline.</a:t>
+              <a:t>Embedder e LLM dominam.</a:t>
             </a:r>
             <a:r>
               <a:rPr sz="2850" b="1" dirty="0">
@@ -17847,7 +17847,7 @@
                 <a:latin typeface="Segoe UI"/>
                 <a:cs typeface="Segoe UI"/>
               </a:rPr>
-              <a:t>Embedding de uma query: 80 a 250 ms (local) ou 60 a 180 ms (OpenAI). O pipeline RAG completo é dominado pelo LLM gerador (1,5 a 4 segundos).</a:t>
+              <a:t>1 query: 80–250 ms local · 60–180 ms OpenAI. LLM 4o-mini: 1,5–4 s por resposta.</a:t>
             </a:r>
             <a:r>
               <a:rPr sz="1650" spc="-55" dirty="0">
@@ -18410,7 +18410,7 @@
                 <a:latin typeface="Consolas"/>
                 <a:cs typeface="Consolas"/>
               </a:rPr>
-              <a:t>Medido em 2026-06-01</a:t>
+              <a:t>Medido 2026-06-01</a:t>
             </a:r>
             <a:r>
               <a:rPr sz="950" b="1" spc="215" dirty="0">
@@ -18520,7 +18520,7 @@
                 <a:latin typeface="Georgia"/>
                 <a:cs typeface="Georgia"/>
               </a:rPr>
-              <a:t>não é gargalo nesta escala.</a:t>
+              <a:t>não é gargalo.</a:t>
             </a:r>
             <a:r>
               <a:rPr sz="2850" b="1" spc="-55" dirty="0">
@@ -18634,7 +18634,7 @@
                 <a:latin typeface="Segoe UI"/>
                 <a:cs typeface="Segoe UI"/>
               </a:rPr>
-              <a:t>p50 de 4,58 ms em 78 documentos e 5,08 ms em 7.943 documentos. p99 de 5,99 ms e 6,97 ms, respectivamente. Passar de 78 para cerca de oito mil documentos adiciona apenas meio milissegundo no p99.</a:t>
+              <a:t>p50: 4,58 ms (78 docs) · 5,08 ms (7.943 docs). p99: 5,99 ms · 6,97 ms.</a:t>
             </a:r>
             <a:r>
               <a:rPr sz="1650" spc="-50" dirty="0">
@@ -20245,7 +20245,7 @@
                 <a:latin typeface="Consolas"/>
                 <a:cs typeface="Consolas"/>
               </a:rPr>
-              <a:t>STACK PROPOSTA</a:t>
+              <a:t>PROPOSTA</a:t>
             </a:r>
             <a:r>
               <a:rPr sz="1100" b="1" spc="280" dirty="0">
@@ -20331,7 +20331,7 @@
                 <a:latin typeface="Georgia"/>
                 <a:cs typeface="Georgia"/>
               </a:rPr>
-              <a:t>Três decisões para encerrar</a:t>
+              <a:t>Três decisões</a:t>
             </a:r>
             <a:r>
               <a:rPr sz="5400" b="1" spc="-125" dirty="0">
@@ -20402,7 +20402,7 @@
                 <a:latin typeface="Georgia"/>
                 <a:cs typeface="Georgia"/>
               </a:rPr>
-              <a:t>a sprint.</a:t>
+              <a:t>para a stack.</a:t>
             </a:r>
             <a:r>
               <a:rPr sz="5400" b="1" spc="-229" dirty="0">
@@ -21314,7 +21314,7 @@
                 <a:latin typeface="Segoe UI"/>
                 <a:cs typeface="Segoe UI"/>
               </a:rPr>
-              <a:t>text-embedding-3-small com dimensions=768. Mantém compatibilidade dimensional, permite A/B sem refazer schema e preserva o Xenova como fallback.</a:t>
+              <a:t>text-embedding-3-small @768. Xenova como fallback.</a:t>
             </a:r>
             <a:r>
               <a:rPr sz="1650" spc="-50" dirty="0">
@@ -22385,7 +22385,7 @@
                 <a:latin typeface="Segoe UI"/>
                 <a:cs typeface="Segoe UI"/>
               </a:rPr>
-              <a:t>Chroma local no curto prazo. O pgvector sobre o Postgres existente entra no roadmap quando a ingestão contínua for implementada.</a:t>
+              <a:t>Chroma agora; pgvector no Postgres entra no roadmap.</a:t>
             </a:r>
             <a:r>
               <a:rPr sz="1650" spc="-55" dirty="0">
@@ -23416,7 +23416,7 @@
                 <a:latin typeface="Segoe UI"/>
                 <a:cs typeface="Segoe UI"/>
               </a:rPr>
-              <a:t>gpt-4o-mini como baseline (US$ 0,0008 por resposta). Subir para gpt-4.1-mini somente com sinal claro de regressão de qualidade.</a:t>
+              <a:t>gpt-4o-mini baseline. Subir só com sinal de regressão.</a:t>
             </a:r>
             <a:r>
               <a:rPr sz="1650" spc="-80" dirty="0">
@@ -24907,7 +24907,7 @@
                 <a:latin typeface="Consolas"/>
                 <a:cs typeface="Consolas"/>
               </a:rPr>
-              <a:t>BLOQUEIO IDENTIFICADO</a:t>
+              <a:t>BLOQUEIO</a:t>
             </a:r>
             <a:endParaRPr sz="1100">
               <a:latin typeface="Consolas"/>
@@ -24953,7 +24953,7 @@
                 <a:latin typeface="Georgia"/>
                 <a:cs typeface="Georgia"/>
               </a:rPr>
-              <a:t>O ambiente atual impede</a:t>
+              <a:t>A TI ainda não</a:t>
             </a:r>
             <a:r>
               <a:rPr sz="5400" b="1" spc="-75" dirty="0">
@@ -25034,7 +25034,7 @@
                 <a:latin typeface="Georgia"/>
                 <a:cs typeface="Georgia"/>
               </a:rPr>
-              <a:t>o bench neural.</a:t>
+              <a:t>liberou a rede.</a:t>
             </a:r>
             <a:r>
               <a:rPr sz="5400" b="1" spc="-75" dirty="0">
@@ -25078,7 +25078,7 @@
                 <a:latin typeface="Segoe UI"/>
                 <a:cs typeface="Segoe UI"/>
               </a:rPr>
-              <a:t>A política de rede do sandbox bloqueia os domínios huggingface.co e api.openai.com. O bench parcial (TF-IDF e latência do Chroma) foi entregue; o bench neural depende de liberação ou de uma estação de trabalho com rede aberta.</a:t>
+              <a:t>Bench parcial entregue; bench neural depende de liberação.</a:t>
             </a:r>
             <a:r>
               <a:rPr sz="2100" spc="-10" dirty="0">
@@ -26031,7 +26031,7 @@
                 <a:latin typeface="Segoe UI"/>
                 <a:cs typeface="Segoe UI"/>
               </a:rPr>
-              <a:t>Necessário para baixar MPNet vanilla, BGE-m3 e demais modelos open source. Uma liberação pontual basta — o modelo fica em cache local.</a:t>
+              <a:t>MPNet, BGE-m3 e demais open source. Liberação pontual.</a:t>
             </a:r>
             <a:r>
               <a:rPr sz="1650" spc="-45" dirty="0">
@@ -27102,7 +27102,7 @@
                 <a:latin typeface="Segoe UI"/>
                 <a:cs typeface="Segoe UI"/>
               </a:rPr>
-              <a:t>Necessário para embeddings v3 e para o LLM gerador. Liberação permanente em produção, restrita por allowlist.</a:t>
+              <a:t>Embeddings v3 e LLM gerador. Liberação permanente, allowlist.</a:t>
             </a:r>
             <a:r>
               <a:rPr sz="1650" spc="-35" dirty="0">
@@ -28110,7 +28110,7 @@
                 <a:latin typeface="Georgia"/>
                 <a:cs typeface="Georgia"/>
               </a:rPr>
-              <a:t>Plano B imediato</a:t>
+              <a:t>Plano B</a:t>
             </a:r>
             <a:r>
               <a:rPr sz="2250" b="1" spc="-25" dirty="0">
@@ -28154,7 +28154,7 @@
                 <a:latin typeface="Segoe UI"/>
                 <a:cs typeface="Segoe UI"/>
               </a:rPr>
-              <a:t>Rodar o bench numa estação pessoal com rede aberta. Os scripts em apps/chroma-server/bench são reprodutíveis em cerca de três horas.</a:t>
+              <a:t>Bench em estação pessoal. Scripts reproduzíveis em ~3 horas.</a:t>
             </a:r>
             <a:r>
               <a:rPr sz="1650" spc="-10" dirty="0">
@@ -29741,7 +29741,7 @@
                 <a:latin typeface="Georgia"/>
                 <a:cs typeface="Georgia"/>
               </a:rPr>
-              <a:t>Quatro frentes em paralelo até a próxima revisão.</a:t>
+              <a:t>Quatro frentes em paralelo.</a:t>
             </a:r>
             <a:r>
               <a:rPr sz="3450" b="1" spc="-45" dirty="0">
@@ -30029,7 +30029,7 @@
                 <a:latin typeface="Segoe UI"/>
                 <a:cs typeface="Segoe UI"/>
               </a:rPr>
-              <a:t>Abrir chamado para a TI liberar huggingface.co e api.openai.com.</a:t>
+              <a:t>Chamado TI: huggingface.co + api.openai.com.</a:t>
             </a:r>
             <a:r>
               <a:rPr sz="1650" spc="-50" dirty="0">
@@ -30277,7 +30277,7 @@
                 <a:latin typeface="Segoe UI"/>
                 <a:cs typeface="Segoe UI"/>
               </a:rPr>
-              <a:t>Executar prepare.py, run-queries e score.py com a chave da OpenAI.</a:t>
+              <a:t>prepare.py + run-queries + score.py com chave OpenAI.</a:t>
             </a:r>
             <a:r>
               <a:rPr sz="1650" spc="-55" dirty="0">
@@ -30555,7 +30555,7 @@
                 <a:latin typeface="Segoe UI"/>
                 <a:cs typeface="Segoe UI"/>
               </a:rPr>
-              <a:t>Definir o destino do fine_tuned_report_model: manter, descontinuar ou versionar.</a:t>
+              <a:t>Destino do fine_tuned_report_model.</a:t>
             </a:r>
             <a:r>
               <a:rPr sz="1650" spc="-60" dirty="0">
@@ -30833,7 +30833,7 @@
                 <a:latin typeface="Segoe UI"/>
                 <a:cs typeface="Segoe UI"/>
               </a:rPr>
-              <a:t>Construir o pipeline de ingestão contínua sobre o Postgres existente.</a:t>
+              <a:t>Pipeline de ingestão sobre o Postgres existente.</a:t>
             </a:r>
             <a:r>
               <a:rPr sz="1650" spc="-50" dirty="0">
@@ -32259,7 +32259,7 @@
                 <a:latin typeface="Consolas"/>
                 <a:cs typeface="Consolas"/>
               </a:rPr>
-              <a:t>ROTEIRO DA APRESENTAÇÃO</a:t>
+              <a:t>ROTEIRO</a:t>
             </a:r>
             <a:r>
               <a:rPr sz="1100" b="1" spc="305" dirty="0">
@@ -32325,7 +32325,7 @@
                 <a:latin typeface="Georgia"/>
                 <a:cs typeface="Georgia"/>
               </a:rPr>
-              <a:t>Da descoberta no corpus à recomendação de stack.</a:t>
+              <a:t>Do corpus à recomendação.</a:t>
             </a:r>
             <a:r>
               <a:rPr sz="5400" b="1" spc="-10" dirty="0">
@@ -32507,7 +32507,7 @@
                           <a:latin typeface="Consolas"/>
                           <a:cs typeface="Consolas"/>
                         </a:rPr>
-                        <a:t>01	Contexto e descobertas críticas</a:t>
+                        <a:t>01	Contexto e descobertas</a:t>
                       </a:r>
                       <a:r>
                         <a:rPr sz="1050" b="1" dirty="0">
@@ -32731,7 +32731,7 @@
                           <a:latin typeface="Consolas"/>
                           <a:cs typeface="Consolas"/>
                         </a:rPr>
-                        <a:t>03	Corpus real e ingestão contínua</a:t>
+                        <a:t>03	Corpus e ingestão contínua</a:t>
                       </a:r>
                       <a:r>
                         <a:rPr sz="1050" b="1" dirty="0">
@@ -32879,7 +32879,7 @@
                           <a:latin typeface="Segoe UI"/>
                           <a:cs typeface="Segoe UI"/>
                         </a:rPr>
-                        <a:t>Opções avaliadas, custos e latência</a:t>
+                        <a:t>Custos e latência</a:t>
                       </a:r>
                       <a:r>
                         <a:rPr sz="2100" b="1" spc="-40" dirty="0">
@@ -33013,7 +33013,7 @@
                           <a:latin typeface="Consolas"/>
                           <a:cs typeface="Consolas"/>
                         </a:rPr>
-                        <a:t>05	Resultados reais do bench parcial</a:t>
+                        <a:t>05	Bench parcial — resultados</a:t>
                       </a:r>
                       <a:r>
                         <a:rPr sz="1050" b="1" dirty="0">
@@ -33169,7 +33169,7 @@
                           <a:latin typeface="Segoe UI"/>
                           <a:cs typeface="Segoe UI"/>
                         </a:rPr>
-                        <a:t>Stack proposta e próximos passos</a:t>
+                        <a:t>Proposta e próximos passos</a:t>
                       </a:r>
                       <a:r>
                         <a:rPr sz="2100" b="1" spc="-65" dirty="0">
@@ -35609,7 +35609,7 @@
                 <a:latin typeface="Georgia"/>
                 <a:cs typeface="Georgia"/>
               </a:rPr>
-              <a:t>O desafio é precisão semântica, não escala.</a:t>
+              <a:t>Precisão, não escala.</a:t>
             </a:r>
             <a:r>
               <a:rPr sz="8700" b="1" spc="-265" dirty="0">
@@ -35683,7 +35683,7 @@
                 <a:latin typeface="Segoe UI"/>
                 <a:cs typeface="Segoe UI"/>
               </a:rPr>
-              <a:t>Corpus pequeno (8.021 chunks), denso e técnico. Um bug de configuração no embedder já reduz a qualidade hoje. O custo de qualquer embedding é irrelevante. A decisão real está na qualidade do retrieval e na escolha do LLM gerador.</a:t>
+              <a:t>Corpus de 8.021 chunks. Bug atual entre indexação e consulta. Embedding custa centavos; a decisão está no retrieval e no LLM gerador.</a:t>
             </a:r>
             <a:r>
               <a:rPr sz="2100" spc="-15" dirty="0">
@@ -37409,7 +37409,7 @@
                 <a:latin typeface="Consolas"/>
                 <a:cs typeface="Consolas"/>
               </a:rPr>
-              <a:t>DESCOBERTAS CRÍTICAS</a:t>
+              <a:t>ACHADOS</a:t>
             </a:r>
             <a:endParaRPr sz="1100">
               <a:latin typeface="Consolas"/>
@@ -37455,7 +37455,7 @@
                 <a:latin typeface="Georgia"/>
                 <a:cs typeface="Georgia"/>
               </a:rPr>
-              <a:t>Três achados que mudam o desenho</a:t>
+              <a:t>Três achados que</a:t>
             </a:r>
             <a:r>
               <a:rPr sz="5400" b="1" spc="-75" dirty="0">
@@ -37536,7 +37536,7 @@
                 <a:latin typeface="Georgia"/>
                 <a:cs typeface="Georgia"/>
               </a:rPr>
-              <a:t>da sprint.</a:t>
+              <a:t>mudam a sprint.</a:t>
             </a:r>
             <a:r>
               <a:rPr sz="5400" b="1" spc="-75" dirty="0">
@@ -37580,7 +37580,7 @@
                 <a:latin typeface="Segoe UI"/>
                 <a:cs typeface="Segoe UI"/>
               </a:rPr>
-              <a:t>Inspecionei o chroma.sqlite3, o código do db-backend e a configuração da coleção. Cada achado abaixo impacta diretamente a comparação ChromaDB local versus OpenAI Embeddings.</a:t>
+              <a:t>Direto do chroma.sqlite3 e do código do db-backend.</a:t>
             </a:r>
             <a:r>
               <a:rPr sz="2100" spc="-10" dirty="0">
@@ -38487,7 +38487,7 @@
                 <a:latin typeface="Georgia"/>
                 <a:cs typeface="Georgia"/>
               </a:rPr>
-              <a:t>Bug no embedding</a:t>
+              <a:t>Mismatch</a:t>
             </a:r>
             <a:endParaRPr sz="2250">
               <a:latin typeface="Georgia"/>
@@ -38533,7 +38533,7 @@
                 <a:latin typeface="Segoe UI"/>
                 <a:cs typeface="Segoe UI"/>
               </a:rPr>
-              <a:t>A indexação e a consulta usam modelos diferentes; o recall do retrieval atual está degradado de forma imprevisível.</a:t>
+              <a:t>Indexação usa fine-tunado; consulta usa MPNet vanilla.</a:t>
             </a:r>
             <a:r>
               <a:rPr sz="1650" spc="-45" dirty="0">
@@ -39580,7 +39580,7 @@
                 <a:latin typeface="Georgia"/>
                 <a:cs typeface="Georgia"/>
               </a:rPr>
-              <a:t>Corpus pequeno e denso</a:t>
+              <a:t>Corpus pequeno</a:t>
             </a:r>
             <a:endParaRPr sz="2250">
               <a:latin typeface="Georgia"/>
@@ -39604,7 +39604,7 @@
                 <a:latin typeface="Segoe UI"/>
                 <a:cs typeface="Segoe UI"/>
               </a:rPr>
-              <a:t>8.021 chunks (78 laudos + 7.943 captions). O custo de qualquer embedding é irrelevante; o desafio é precisão semântica em jargão técnico.</a:t>
+              <a:t>78 laudos e 7.943 captions de metalografia. Chunk médio: 400 tokens.</a:t>
             </a:r>
             <a:r>
               <a:rPr sz="1650" spc="-35" dirty="0">
@@ -40656,7 +40656,7 @@
                 <a:latin typeface="Segoe UI"/>
                 <a:cs typeface="Segoe UI"/>
               </a:rPr>
-              <a:t>O banco inicial será alimentado conforme novos laudos forem gerados. Esse requisito de arquitetura ainda não está desenhado.</a:t>
+              <a:t>Novos laudos precisam de pipeline assíncrono — ainda não desenhado.</a:t>
             </a:r>
             <a:r>
               <a:rPr sz="1650" spc="-10" dirty="0">
@@ -42270,7 +42270,7 @@
                 <a:latin typeface="Georgia"/>
                 <a:cs typeface="Georgia"/>
               </a:rPr>
-              <a:t>ChromaDB local e sentence-transformer fine-tunado.</a:t>
+              <a:t>Chroma local + fine-tunado interno.</a:t>
             </a:r>
             <a:r>
               <a:rPr sz="5400" b="1" spc="-10" dirty="0">
@@ -42354,7 +42354,7 @@
                 <a:latin typeface="Segoe UI"/>
                 <a:cs typeface="Segoe UI"/>
               </a:rPr>
-              <a:t>O backend NestJS consulta a coleção via cliente chromadb (JS). Os vetores foram gerados por um sentence-transformer fine-tunado internamente (projeto ml_wo), mas as consultas em produção usam Xenova/MPNet vanilla — origem do bug detectado.</a:t>
+              <a:t>NestJS via chromadb (JS). Index com fine-tunado (ml_wo); consultas com MPNet vanilla.</a:t>
             </a:r>
             <a:r>
               <a:rPr sz="2100" spc="-15" dirty="0">
@@ -43507,7 +43507,7 @@
                 <a:latin typeface="Consolas"/>
                 <a:cs typeface="Consolas"/>
               </a:rPr>
-              <a:t>STACK  /  ml_wo</a:t>
+              <a:t>STACK / ml_wo</a:t>
             </a:r>
             <a:r>
               <a:rPr sz="950" b="1" spc="215" dirty="0">
@@ -43919,7 +43919,7 @@
                 <a:latin typeface="Consolas"/>
                 <a:cs typeface="Consolas"/>
               </a:rPr>
-              <a:t>CAMADAS  ·  EMBEDDER  ·  VECTOR STORE  ·  CLIENTE  ·  LLM GERADOR</a:t>
+              <a:t>CAMADAS  ·  EMBEDDER  ·  STORE  ·  CLIENTE  ·  LLM</a:t>
             </a:r>
             <a:r>
               <a:rPr sz="950" b="1" spc="215" dirty="0">
@@ -45355,7 +45355,7 @@
                 <a:latin typeface="Consolas"/>
                 <a:cs typeface="Consolas"/>
               </a:rPr>
-              <a:t>OPÇÕES AVALIADAS</a:t>
+              <a:t>OPÇÕES</a:t>
             </a:r>
             <a:r>
               <a:rPr sz="1100" b="1" spc="280" dirty="0">
@@ -45441,7 +45441,7 @@
                 <a:latin typeface="Georgia"/>
                 <a:cs typeface="Georgia"/>
               </a:rPr>
-              <a:t>Três caminhos para a stack,</a:t>
+              <a:t>Três caminhos,</a:t>
             </a:r>
             <a:r>
               <a:rPr sz="5400" b="1" spc="-125" dirty="0">
@@ -45512,7 +45512,7 @@
                 <a:latin typeface="Georgia"/>
                 <a:cs typeface="Georgia"/>
               </a:rPr>
-              <a:t>comparados no mesmo bench.</a:t>
+              <a:t>mesmo bench.</a:t>
             </a:r>
             <a:r>
               <a:rPr sz="5400" b="1" spc="-229" dirty="0">
@@ -46424,7 +46424,7 @@
                 <a:latin typeface="Segoe UI"/>
                 <a:cs typeface="Segoe UI"/>
               </a:rPr>
-              <a:t>Reindexar com Xenova/MPNet vanilla e manter o Chroma local. Zero dependência externa; corrige o bug atual sem migrar de provedor.</a:t>
+              <a:t>Reindex com vanilla. Chroma local. Corrige o bug sem migrar.</a:t>
             </a:r>
             <a:r>
               <a:rPr sz="1650" spc="-50" dirty="0">
@@ -47495,7 +47495,7 @@
                 <a:latin typeface="Segoe UI"/>
                 <a:cs typeface="Segoe UI"/>
               </a:rPr>
-              <a:t>Trocar o embedder para text-embedding-3-small (dimensions=768) via API. O Chroma continua local; permite A/B sem refazer schema.</a:t>
+              <a:t>text-embedding-3-small @768 via API. A/B sem refazer schema.</a:t>
             </a:r>
             <a:r>
               <a:rPr sz="1650" spc="-55" dirty="0">
@@ -48526,7 +48526,7 @@
                 <a:latin typeface="Segoe UI"/>
                 <a:cs typeface="Segoe UI"/>
               </a:rPr>
-              <a:t>Embedder OpenAI e pgvector sobre o Postgres existente. Elimina o chroma-server Python; entra no roadmap com a ingestão contínua.</a:t>
+              <a:t>OpenAI + pgvector no Postgres. Sem chroma-server Python.</a:t>
             </a:r>
             <a:r>
               <a:rPr sz="1650" spc="-80" dirty="0">
@@ -50032,7 +50032,7 @@
                 <a:latin typeface="Consolas"/>
                 <a:cs typeface="Consolas"/>
               </a:rPr>
-              <a:t>CRITÉRIOS DE DECISÃO</a:t>
+              <a:t>CRITÉRIOS</a:t>
             </a:r>
             <a:r>
               <a:rPr sz="1100" b="1" spc="285" dirty="0">
@@ -50098,7 +50098,7 @@
                 <a:latin typeface="Georgia"/>
                 <a:cs typeface="Georgia"/>
               </a:rPr>
-              <a:t>“Trocar para OpenAI somente se o bench mostrar Recall@5 ≥ +5 pp, MRR ≥ +0,05 e p95 ponta a ponta ≤ 400 ms — com DPA assinado, ZDR habilitado e mascaramento de PII.”</a:t>
+              <a:t>“Migrar para OpenAI somente se Recall@5 ≥ +5 pp, MRR ≥ +0,05 e p95 ≤ 400 ms.”</a:t>
             </a:r>
             <a:r>
               <a:rPr sz="5250" b="1" spc="-10" dirty="0">
@@ -50282,7 +50282,7 @@
                 <a:latin typeface="Consolas"/>
                 <a:cs typeface="Consolas"/>
               </a:rPr>
-              <a:t>CRITÉRIOS OBJETIVOS DE GO / NO-GO PARA A MIGRAÇÃO</a:t>
+              <a:t>DPA · ZDR · MASCARAMENTO DE PII COMO PRÉ-CONDIÇÕES</a:t>
             </a:r>
             <a:r>
               <a:rPr sz="1350" b="1" spc="270" dirty="0">
@@ -51876,7 +51876,7 @@
                 <a:latin typeface="Georgia"/>
                 <a:cs typeface="Georgia"/>
               </a:rPr>
-              <a:t>Embedding não é onde mora o custo.</a:t>
+              <a:t>Embedding ≠</a:t>
             </a:r>
             <a:r>
               <a:rPr sz="5400" b="1" spc="-100" dirty="0">
@@ -53030,7 +53030,7 @@
                 <a:latin typeface="Segoe UI"/>
                 <a:cs typeface="Segoe UI"/>
               </a:rPr>
-              <a:t>Reindexar todo o corpus atual via text-embedding-3-small custa US$ 0,06 em Standard ou US$ 0,03 em Batch. Reindex anual é financeiramente irrelevante.</a:t>
+              <a:t>Corpus completo: US$ 0,06 Standard · US$ 0,03 Batch.</a:t>
             </a:r>
             <a:r>
               <a:rPr sz="1650" spc="-35" dirty="0">
@@ -54234,7 +54234,7 @@
                 <a:latin typeface="Segoe UI"/>
                 <a:cs typeface="Segoe UI"/>
               </a:rPr>
-              <a:t>Cada consulta custa cerca de US$ 0,0000006. Mesmo no cenário de cem mil consultas por mês, o custo total fica em US$ 0,06.</a:t>
+              <a:t>US$ 0,0000006 por chamada. 100 k/mês = US$ 0,06.</a:t>
             </a:r>
             <a:r>
               <a:rPr sz="1650" spc="-40" dirty="0">
@@ -55380,7 +55380,7 @@
                 <a:latin typeface="Georgia"/>
                 <a:cs typeface="Georgia"/>
               </a:rPr>
-              <a:t>LLM gerador</a:t>
+              <a:t>LLM gpt-4o-mini</a:t>
             </a:r>
             <a:endParaRPr sz="2250">
               <a:latin typeface="Georgia"/>
@@ -55404,7 +55404,7 @@
                 <a:latin typeface="Segoe UI"/>
                 <a:cs typeface="Segoe UI"/>
               </a:rPr>
-              <a:t>gpt-4o-mini custa US$ 0,0008 por resposta (três mil tokens de entrada e quinhentos de saída). Dez mil respostas por mês: US$ 8. Aqui mora o custo real.</a:t>
+              <a:t>US$ 0,0008 por resposta. 10 k/mês = US$ 8.</a:t>
             </a:r>
             <a:r>
               <a:rPr sz="1650" spc="-55" dirty="0">
@@ -56882,7 +56882,7 @@
                 <a:latin typeface="Consolas"/>
                 <a:cs typeface="Consolas"/>
               </a:rPr>
-              <a:t>PROVA E EVIDÊNCIA — BENCH 2026-06-01</a:t>
+              <a:t>BENCH — 2026-06-01</a:t>
             </a:r>
             <a:r>
               <a:rPr sz="1100" b="1" spc="290" dirty="0">
@@ -56943,7 +56943,7 @@
                 <a:latin typeface="Georgia"/>
                 <a:cs typeface="Georgia"/>
               </a:rPr>
-              <a:t>Recall@5 = 0,671 no baseline TF-IDF.</a:t>
+              <a:t>67 %</a:t>
             </a:r>
             <a:r>
               <a:rPr sz="10050" b="1" dirty="0">
@@ -56977,7 +56977,7 @@
                 <a:latin typeface="Segoe UI"/>
                 <a:cs typeface="Segoe UI"/>
               </a:rPr>
-              <a:t>234 consultas sintéticas contra 78 chunks. O TF-IDF acerta 100 % das consultas que repetem o texto do chunk, mas apenas 12 % das consultas por número de relatório.</a:t>
+              <a:t>Recall@5 do baseline TF-IDF — piso a superar.</a:t>
             </a:r>
             <a:r>
               <a:rPr sz="2250" spc="-65" dirty="0">
@@ -57181,7 +57181,7 @@
                 <a:latin typeface="Segoe UI"/>
                 <a:cs typeface="Segoe UI"/>
               </a:rPr>
-              <a:t>Esse intervalo é exatamente o ganho que o retrieval semântico precisa entregar.</a:t>
+              <a:t>234 consultas, 78 chunks.</a:t>
             </a:r>
             <a:r>
               <a:rPr sz="2250" spc="-45" dirty="0">

--- a/references/Apresentacao_RAG_2026-06-01.pptx
+++ b/references/Apresentacao_RAG_2026-06-01.pptx
@@ -21,7 +21,6 @@
     <p:sldId id="262" r:id="rId8"/>
     <p:sldId id="271" r:id="rId21"/>
     <p:sldId id="272" r:id="rId22"/>
-    <p:sldId id="267" r:id="rId13"/>
   </p:sldIdLst>
   <p:sldSz cx="18288000" cy="10287000"/>
   <p:notesSz cx="18288000" cy="10287000"/>
@@ -2580,7 +2579,7 @@
                 <a:latin typeface="Segoe UI"/>
                 <a:cs typeface="Segoe UI"/>
               </a:rPr>
-              <a:t>ChromaDB local vs. OpenAI Embeddings. Embedder, vector store, LLM e ingestão contínua.</a:t>
+              <a:t>Comparativo ChromaDB local vs. OpenAI Embeddings + API. Embedder, vector store, LLM e ingestão contínua.</a:t>
             </a:r>
             <a:r>
               <a:rPr sz="2100" spc="-25" dirty="0">
@@ -4989,7 +4988,7 @@
                 <a:latin typeface="Segoe UI"/>
                 <a:cs typeface="Segoe UI"/>
               </a:rPr>
-              <a:t>Seção “Discussão dos Resultados”. ~400 tokens por chunk. 100 % Análise de Falha PETROBRÁS.</a:t>
+              <a:t>Cada chunk é a seção “Discussão dos Resultados” do laudo. Em média 400 tokens; 100 % são Análises de Falha PETROBRÁS.</a:t>
             </a:r>
             <a:r>
               <a:rPr sz="1650" spc="-55" dirty="0">
@@ -5776,7 +5775,7 @@
                 <a:latin typeface="Segoe UI"/>
                 <a:cs typeface="Segoe UI"/>
               </a:rPr>
-              <a:t>~100 captions por laudo. Atende consultas onde a resposta está na imagem, não no texto.</a:t>
+              <a:t>Cerca de cem captions por laudo. Atendem consultas em que a resposta está na imagem, não no texto principal.</a:t>
             </a:r>
             <a:r>
               <a:rPr sz="1650" spc="-50" dirty="0">
@@ -7283,7 +7282,7 @@
                 <a:latin typeface="Consolas"/>
                 <a:cs typeface="Consolas"/>
               </a:rPr>
-              <a:t>07 / 17</a:t>
+              <a:t>07 / 16</a:t>
             </a:r>
             <a:r>
               <a:rPr sz="950" b="1" spc="229" dirty="0">
@@ -7460,7 +7459,7 @@
                 <a:latin typeface="Georgia"/>
                 <a:cs typeface="Georgia"/>
               </a:rPr>
-              <a:t>Novo laudo buscável em &lt; 1 minuto.</a:t>
+              <a:t>Novo laudo buscável em até um minuto.</a:t>
             </a:r>
             <a:r>
               <a:rPr sz="3450" b="1" spc="-45" dirty="0">
@@ -7748,7 +7747,7 @@
                 <a:latin typeface="Segoe UI"/>
                 <a:cs typeface="Segoe UI"/>
               </a:rPr>
-              <a:t>report-generate finaliza o DOCX e emite evento.</a:t>
+              <a:t>report-generate fecha o DOCX e emite evento.</a:t>
             </a:r>
             <a:r>
               <a:rPr sz="1650" spc="-50" dirty="0">
@@ -9859,2480 +9858,7 @@
                 <a:latin typeface="Consolas"/>
                 <a:cs typeface="Consolas"/>
               </a:rPr>
-              <a:t>08 / 17</a:t>
-            </a:r>
-            <a:r>
-              <a:rPr sz="950" b="1" spc="229" dirty="0">
-                <a:solidFill>
-                  <a:srgbClr val="FEFBF8"/>
-                </a:solidFill>
-                <a:latin typeface="Consolas"/>
-                <a:cs typeface="Consolas"/>
-              </a:rPr>
-              <a:t/>
-            </a:r>
-            <a:r>
-              <a:rPr sz="950" b="1" dirty="0">
-                <a:solidFill>
-                  <a:srgbClr val="FEFBF8"/>
-                </a:solidFill>
-                <a:latin typeface="Consolas"/>
-                <a:cs typeface="Consolas"/>
-              </a:rPr>
-              <a:t/>
-            </a:r>
-            <a:r>
-              <a:rPr sz="950" b="1" spc="235" dirty="0">
-                <a:solidFill>
-                  <a:srgbClr val="FEFBF8"/>
-                </a:solidFill>
-                <a:latin typeface="Consolas"/>
-                <a:cs typeface="Consolas"/>
-              </a:rPr>
-              <a:t/>
-            </a:r>
-            <a:r>
-              <a:rPr sz="950" b="1" spc="35" dirty="0">
-                <a:solidFill>
-                  <a:srgbClr val="FEFBF8"/>
-                </a:solidFill>
-                <a:latin typeface="Consolas"/>
-                <a:cs typeface="Consolas"/>
-              </a:rPr>
-              <a:t/>
-            </a:r>
-            <a:endParaRPr sz="950">
-              <a:latin typeface="Consolas"/>
-              <a:cs typeface="Consolas"/>
-            </a:endParaRPr>
-          </a:p>
-        </p:txBody>
-      </p:sp>
-    </p:spTree>
-  </p:cSld>
-  <p:clrMapOvr>
-    <a:masterClrMapping/>
-  </p:clrMapOvr>
-</p:sld>
-</file>
-
-<file path=ppt/slides/slide12.xml><?xml version="1.0" encoding="utf-8"?>
-<p:sld xmlns:a="http://schemas.openxmlformats.org/drawingml/2006/main" xmlns:r="http://schemas.openxmlformats.org/officeDocument/2006/relationships" xmlns:p="http://schemas.openxmlformats.org/presentationml/2006/main">
-  <p:cSld>
-    <p:spTree>
-      <p:nvGrpSpPr>
-        <p:cNvPr id="1" name=""/>
-        <p:cNvGrpSpPr/>
-        <p:nvPr/>
-      </p:nvGrpSpPr>
-      <p:grpSpPr>
-        <a:xfrm>
-          <a:off x="0" y="0"/>
-          <a:ext cx="0" cy="0"/>
-          <a:chOff x="0" y="0"/>
-          <a:chExt cx="0" cy="0"/>
-        </a:xfrm>
-      </p:grpSpPr>
-      <p:sp>
-        <p:nvSpPr>
-          <p:cNvPr id="2" name="object 2"/>
-          <p:cNvSpPr/>
-          <p:nvPr/>
-        </p:nvSpPr>
-        <p:spPr>
-          <a:xfrm>
-            <a:off x="11264524" y="5148274"/>
-            <a:ext cx="7023734" cy="5139055"/>
-          </a:xfrm>
-          <a:custGeom>
-            <a:avLst/>
-            <a:gdLst/>
-            <a:ahLst/>
-            <a:cxnLst/>
-            <a:rect l="l" t="t" r="r" b="b"/>
-            <a:pathLst>
-              <a:path w="7023734" h="5139055">
-                <a:moveTo>
-                  <a:pt x="0" y="5138726"/>
-                </a:moveTo>
-                <a:lnTo>
-                  <a:pt x="5586" y="5076806"/>
-                </a:lnTo>
-                <a:lnTo>
-                  <a:pt x="11139" y="5021956"/>
-                </a:lnTo>
-                <a:lnTo>
-                  <a:pt x="17230" y="4967164"/>
-                </a:lnTo>
-                <a:lnTo>
-                  <a:pt x="23859" y="4912442"/>
-                </a:lnTo>
-                <a:lnTo>
-                  <a:pt x="31023" y="4857790"/>
-                </a:lnTo>
-                <a:lnTo>
-                  <a:pt x="38725" y="4803208"/>
-                </a:lnTo>
-                <a:lnTo>
-                  <a:pt x="46963" y="4748697"/>
-                </a:lnTo>
-                <a:lnTo>
-                  <a:pt x="55735" y="4694269"/>
-                </a:lnTo>
-                <a:lnTo>
-                  <a:pt x="65040" y="4639938"/>
-                </a:lnTo>
-                <a:lnTo>
-                  <a:pt x="74878" y="4585704"/>
-                </a:lnTo>
-                <a:lnTo>
-                  <a:pt x="85248" y="4531566"/>
-                </a:lnTo>
-                <a:lnTo>
-                  <a:pt x="96151" y="4477524"/>
-                </a:lnTo>
-                <a:lnTo>
-                  <a:pt x="107584" y="4423593"/>
-                </a:lnTo>
-                <a:lnTo>
-                  <a:pt x="119544" y="4369784"/>
-                </a:lnTo>
-                <a:lnTo>
-                  <a:pt x="132031" y="4316098"/>
-                </a:lnTo>
-                <a:lnTo>
-                  <a:pt x="145045" y="4262534"/>
-                </a:lnTo>
-                <a:lnTo>
-                  <a:pt x="158586" y="4209093"/>
-                </a:lnTo>
-                <a:lnTo>
-                  <a:pt x="172652" y="4155787"/>
-                </a:lnTo>
-                <a:lnTo>
-                  <a:pt x="187237" y="4102630"/>
-                </a:lnTo>
-                <a:lnTo>
-                  <a:pt x="202344" y="4049621"/>
-                </a:lnTo>
-                <a:lnTo>
-                  <a:pt x="217971" y="3996760"/>
-                </a:lnTo>
-                <a:lnTo>
-                  <a:pt x="234118" y="3944048"/>
-                </a:lnTo>
-                <a:lnTo>
-                  <a:pt x="250782" y="3891496"/>
-                </a:lnTo>
-                <a:lnTo>
-                  <a:pt x="267958" y="3839119"/>
-                </a:lnTo>
-                <a:lnTo>
-                  <a:pt x="285647" y="3786915"/>
-                </a:lnTo>
-                <a:lnTo>
-                  <a:pt x="303849" y="3734885"/>
-                </a:lnTo>
-                <a:lnTo>
-                  <a:pt x="322563" y="3683028"/>
-                </a:lnTo>
-                <a:lnTo>
-                  <a:pt x="341786" y="3631358"/>
-                </a:lnTo>
-                <a:lnTo>
-                  <a:pt x="361512" y="3579886"/>
-                </a:lnTo>
-                <a:lnTo>
-                  <a:pt x="381741" y="3528613"/>
-                </a:lnTo>
-                <a:lnTo>
-                  <a:pt x="402474" y="3477538"/>
-                </a:lnTo>
-                <a:lnTo>
-                  <a:pt x="423710" y="3426662"/>
-                </a:lnTo>
-                <a:lnTo>
-                  <a:pt x="445445" y="3375997"/>
-                </a:lnTo>
-                <a:lnTo>
-                  <a:pt x="467672" y="3325556"/>
-                </a:lnTo>
-                <a:lnTo>
-                  <a:pt x="490393" y="3275337"/>
-                </a:lnTo>
-                <a:lnTo>
-                  <a:pt x="513607" y="3225341"/>
-                </a:lnTo>
-                <a:lnTo>
-                  <a:pt x="537314" y="3175569"/>
-                </a:lnTo>
-                <a:lnTo>
-                  <a:pt x="561508" y="3126031"/>
-                </a:lnTo>
-                <a:lnTo>
-                  <a:pt x="586184" y="3076741"/>
-                </a:lnTo>
-                <a:lnTo>
-                  <a:pt x="611342" y="3027697"/>
-                </a:lnTo>
-                <a:lnTo>
-                  <a:pt x="636981" y="2978901"/>
-                </a:lnTo>
-                <a:lnTo>
-                  <a:pt x="663102" y="2930352"/>
-                </a:lnTo>
-                <a:lnTo>
-                  <a:pt x="689698" y="2882061"/>
-                </a:lnTo>
-                <a:lnTo>
-                  <a:pt x="716763" y="2834041"/>
-                </a:lnTo>
-                <a:lnTo>
-                  <a:pt x="744296" y="2786291"/>
-                </a:lnTo>
-                <a:lnTo>
-                  <a:pt x="772299" y="2738812"/>
-                </a:lnTo>
-                <a:lnTo>
-                  <a:pt x="800770" y="2691603"/>
-                </a:lnTo>
-                <a:lnTo>
-                  <a:pt x="829704" y="2644675"/>
-                </a:lnTo>
-                <a:lnTo>
-                  <a:pt x="859092" y="2598041"/>
-                </a:lnTo>
-                <a:lnTo>
-                  <a:pt x="888936" y="2551699"/>
-                </a:lnTo>
-                <a:lnTo>
-                  <a:pt x="919234" y="2505651"/>
-                </a:lnTo>
-                <a:lnTo>
-                  <a:pt x="949988" y="2459895"/>
-                </a:lnTo>
-                <a:lnTo>
-                  <a:pt x="981189" y="2414444"/>
-                </a:lnTo>
-                <a:lnTo>
-                  <a:pt x="1012830" y="2369308"/>
-                </a:lnTo>
-                <a:lnTo>
-                  <a:pt x="1044912" y="2324487"/>
-                </a:lnTo>
-                <a:lnTo>
-                  <a:pt x="1077433" y="2279981"/>
-                </a:lnTo>
-                <a:lnTo>
-                  <a:pt x="1110395" y="2235790"/>
-                </a:lnTo>
-                <a:lnTo>
-                  <a:pt x="1143789" y="2191924"/>
-                </a:lnTo>
-                <a:lnTo>
-                  <a:pt x="1177607" y="2148395"/>
-                </a:lnTo>
-                <a:lnTo>
-                  <a:pt x="1211849" y="2105202"/>
-                </a:lnTo>
-                <a:lnTo>
-                  <a:pt x="1246515" y="2062345"/>
-                </a:lnTo>
-                <a:lnTo>
-                  <a:pt x="1281605" y="2019825"/>
-                </a:lnTo>
-                <a:lnTo>
-                  <a:pt x="1317111" y="1977650"/>
-                </a:lnTo>
-                <a:lnTo>
-                  <a:pt x="1353024" y="1935833"/>
-                </a:lnTo>
-                <a:lnTo>
-                  <a:pt x="1389344" y="1894372"/>
-                </a:lnTo>
-                <a:lnTo>
-                  <a:pt x="1426072" y="1853268"/>
-                </a:lnTo>
-                <a:lnTo>
-                  <a:pt x="1463206" y="1812520"/>
-                </a:lnTo>
-                <a:lnTo>
-                  <a:pt x="1500739" y="1772139"/>
-                </a:lnTo>
-                <a:lnTo>
-                  <a:pt x="1538660" y="1732134"/>
-                </a:lnTo>
-                <a:lnTo>
-                  <a:pt x="1576971" y="1692506"/>
-                </a:lnTo>
-                <a:lnTo>
-                  <a:pt x="1615671" y="1653253"/>
-                </a:lnTo>
-                <a:lnTo>
-                  <a:pt x="1654760" y="1614377"/>
-                </a:lnTo>
-                <a:lnTo>
-                  <a:pt x="1694229" y="1575886"/>
-                </a:lnTo>
-                <a:lnTo>
-                  <a:pt x="1734068" y="1537790"/>
-                </a:lnTo>
-                <a:lnTo>
-                  <a:pt x="1774277" y="1500089"/>
-                </a:lnTo>
-                <a:lnTo>
-                  <a:pt x="1814856" y="1462782"/>
-                </a:lnTo>
-                <a:lnTo>
-                  <a:pt x="1855806" y="1425871"/>
-                </a:lnTo>
-                <a:lnTo>
-                  <a:pt x="1897116" y="1389363"/>
-                </a:lnTo>
-                <a:lnTo>
-                  <a:pt x="1938776" y="1353268"/>
-                </a:lnTo>
-                <a:lnTo>
-                  <a:pt x="1980787" y="1317585"/>
-                </a:lnTo>
-                <a:lnTo>
-                  <a:pt x="2023148" y="1282315"/>
-                </a:lnTo>
-                <a:lnTo>
-                  <a:pt x="2065859" y="1247457"/>
-                </a:lnTo>
-                <a:lnTo>
-                  <a:pt x="2108911" y="1213020"/>
-                </a:lnTo>
-                <a:lnTo>
-                  <a:pt x="2152292" y="1179012"/>
-                </a:lnTo>
-                <a:lnTo>
-                  <a:pt x="2196003" y="1145434"/>
-                </a:lnTo>
-                <a:lnTo>
-                  <a:pt x="2240043" y="1112285"/>
-                </a:lnTo>
-                <a:lnTo>
-                  <a:pt x="2284414" y="1079565"/>
-                </a:lnTo>
-                <a:lnTo>
-                  <a:pt x="2329103" y="1047282"/>
-                </a:lnTo>
-                <a:lnTo>
-                  <a:pt x="2374101" y="1015443"/>
-                </a:lnTo>
-                <a:lnTo>
-                  <a:pt x="2419406" y="984050"/>
-                </a:lnTo>
-                <a:lnTo>
-                  <a:pt x="2465020" y="953102"/>
-                </a:lnTo>
-                <a:lnTo>
-                  <a:pt x="2510943" y="922598"/>
-                </a:lnTo>
-                <a:lnTo>
-                  <a:pt x="2557162" y="892547"/>
-                </a:lnTo>
-                <a:lnTo>
-                  <a:pt x="2603668" y="862955"/>
-                </a:lnTo>
-                <a:lnTo>
-                  <a:pt x="2650460" y="833823"/>
-                </a:lnTo>
-                <a:lnTo>
-                  <a:pt x="2697537" y="805150"/>
-                </a:lnTo>
-                <a:lnTo>
-                  <a:pt x="2744901" y="776937"/>
-                </a:lnTo>
-                <a:lnTo>
-                  <a:pt x="2792540" y="749190"/>
-                </a:lnTo>
-                <a:lnTo>
-                  <a:pt x="2840441" y="721915"/>
-                </a:lnTo>
-                <a:lnTo>
-                  <a:pt x="2888606" y="695114"/>
-                </a:lnTo>
-                <a:lnTo>
-                  <a:pt x="2937034" y="668786"/>
-                </a:lnTo>
-                <a:lnTo>
-                  <a:pt x="2985725" y="642930"/>
-                </a:lnTo>
-                <a:lnTo>
-                  <a:pt x="3034668" y="617554"/>
-                </a:lnTo>
-                <a:lnTo>
-                  <a:pt x="3083850" y="592663"/>
-                </a:lnTo>
-                <a:lnTo>
-                  <a:pt x="3133272" y="568257"/>
-                </a:lnTo>
-                <a:lnTo>
-                  <a:pt x="3182934" y="544337"/>
-                </a:lnTo>
-                <a:lnTo>
-                  <a:pt x="3232835" y="520902"/>
-                </a:lnTo>
-                <a:lnTo>
-                  <a:pt x="3282963" y="497958"/>
-                </a:lnTo>
-                <a:lnTo>
-                  <a:pt x="3333308" y="475510"/>
-                </a:lnTo>
-                <a:lnTo>
-                  <a:pt x="3383868" y="453559"/>
-                </a:lnTo>
-                <a:lnTo>
-                  <a:pt x="3434643" y="432104"/>
-                </a:lnTo>
-                <a:lnTo>
-                  <a:pt x="3485634" y="411146"/>
-                </a:lnTo>
-                <a:lnTo>
-                  <a:pt x="3536828" y="390689"/>
-                </a:lnTo>
-                <a:lnTo>
-                  <a:pt x="3588213" y="370738"/>
-                </a:lnTo>
-                <a:lnTo>
-                  <a:pt x="3639789" y="351294"/>
-                </a:lnTo>
-                <a:lnTo>
-                  <a:pt x="3691556" y="332357"/>
-                </a:lnTo>
-                <a:lnTo>
-                  <a:pt x="3743514" y="313926"/>
-                </a:lnTo>
-                <a:lnTo>
-                  <a:pt x="3795651" y="296005"/>
-                </a:lnTo>
-                <a:lnTo>
-                  <a:pt x="3847953" y="278600"/>
-                </a:lnTo>
-                <a:lnTo>
-                  <a:pt x="3900421" y="261711"/>
-                </a:lnTo>
-                <a:lnTo>
-                  <a:pt x="3953055" y="245336"/>
-                </a:lnTo>
-                <a:lnTo>
-                  <a:pt x="4005854" y="229476"/>
-                </a:lnTo>
-                <a:lnTo>
-                  <a:pt x="4058807" y="214136"/>
-                </a:lnTo>
-                <a:lnTo>
-                  <a:pt x="4111900" y="199318"/>
-                </a:lnTo>
-                <a:lnTo>
-                  <a:pt x="4165134" y="185023"/>
-                </a:lnTo>
-                <a:lnTo>
-                  <a:pt x="4218508" y="171251"/>
-                </a:lnTo>
-                <a:lnTo>
-                  <a:pt x="4272022" y="158001"/>
-                </a:lnTo>
-                <a:lnTo>
-                  <a:pt x="4325664" y="145278"/>
-                </a:lnTo>
-                <a:lnTo>
-                  <a:pt x="4379420" y="133083"/>
-                </a:lnTo>
-                <a:lnTo>
-                  <a:pt x="4433291" y="121417"/>
-                </a:lnTo>
-                <a:lnTo>
-                  <a:pt x="4487276" y="110281"/>
-                </a:lnTo>
-                <a:lnTo>
-                  <a:pt x="4541376" y="99673"/>
-                </a:lnTo>
-                <a:lnTo>
-                  <a:pt x="4595578" y="89596"/>
-                </a:lnTo>
-                <a:lnTo>
-                  <a:pt x="4649868" y="80054"/>
-                </a:lnTo>
-                <a:lnTo>
-                  <a:pt x="4704246" y="71046"/>
-                </a:lnTo>
-                <a:lnTo>
-                  <a:pt x="4758713" y="62571"/>
-                </a:lnTo>
-                <a:lnTo>
-                  <a:pt x="4813268" y="54631"/>
-                </a:lnTo>
-                <a:lnTo>
-                  <a:pt x="4867899" y="47226"/>
-                </a:lnTo>
-                <a:lnTo>
-                  <a:pt x="4922591" y="40359"/>
-                </a:lnTo>
-                <a:lnTo>
-                  <a:pt x="4977346" y="34030"/>
-                </a:lnTo>
-                <a:lnTo>
-                  <a:pt x="5032163" y="28238"/>
-                </a:lnTo>
-                <a:lnTo>
-                  <a:pt x="5087042" y="22984"/>
-                </a:lnTo>
-                <a:lnTo>
-                  <a:pt x="5141970" y="18269"/>
-                </a:lnTo>
-                <a:lnTo>
-                  <a:pt x="5196934" y="14094"/>
-                </a:lnTo>
-                <a:lnTo>
-                  <a:pt x="5251934" y="10459"/>
-                </a:lnTo>
-                <a:lnTo>
-                  <a:pt x="5306969" y="7364"/>
-                </a:lnTo>
-                <a:lnTo>
-                  <a:pt x="5362040" y="4809"/>
-                </a:lnTo>
-                <a:lnTo>
-                  <a:pt x="5417133" y="2795"/>
-                </a:lnTo>
-                <a:lnTo>
-                  <a:pt x="5472236" y="1322"/>
-                </a:lnTo>
-                <a:lnTo>
-                  <a:pt x="5527347" y="390"/>
-                </a:lnTo>
-                <a:lnTo>
-                  <a:pt x="5582468" y="0"/>
-                </a:lnTo>
-                <a:lnTo>
-                  <a:pt x="5637597" y="150"/>
-                </a:lnTo>
-                <a:lnTo>
-                  <a:pt x="5692723" y="841"/>
-                </a:lnTo>
-                <a:lnTo>
-                  <a:pt x="5747831" y="2074"/>
-                </a:lnTo>
-                <a:lnTo>
-                  <a:pt x="5802922" y="3847"/>
-                </a:lnTo>
-                <a:lnTo>
-                  <a:pt x="5857996" y="6162"/>
-                </a:lnTo>
-                <a:lnTo>
-                  <a:pt x="5913052" y="9017"/>
-                </a:lnTo>
-                <a:lnTo>
-                  <a:pt x="5968077" y="12413"/>
-                </a:lnTo>
-                <a:lnTo>
-                  <a:pt x="6023059" y="16348"/>
-                </a:lnTo>
-                <a:lnTo>
-                  <a:pt x="6077996" y="20822"/>
-                </a:lnTo>
-                <a:lnTo>
-                  <a:pt x="6132890" y="25836"/>
-                </a:lnTo>
-                <a:lnTo>
-                  <a:pt x="6187740" y="31389"/>
-                </a:lnTo>
-                <a:lnTo>
-                  <a:pt x="6242532" y="37481"/>
-                </a:lnTo>
-                <a:lnTo>
-                  <a:pt x="6297254" y="44109"/>
-                </a:lnTo>
-                <a:lnTo>
-                  <a:pt x="6351906" y="51274"/>
-                </a:lnTo>
-                <a:lnTo>
-                  <a:pt x="6406488" y="58975"/>
-                </a:lnTo>
-                <a:lnTo>
-                  <a:pt x="6460999" y="67213"/>
-                </a:lnTo>
-                <a:lnTo>
-                  <a:pt x="6515427" y="75985"/>
-                </a:lnTo>
-                <a:lnTo>
-                  <a:pt x="6569758" y="85291"/>
-                </a:lnTo>
-                <a:lnTo>
-                  <a:pt x="6623992" y="95128"/>
-                </a:lnTo>
-                <a:lnTo>
-                  <a:pt x="6678130" y="105499"/>
-                </a:lnTo>
-                <a:lnTo>
-                  <a:pt x="6732171" y="116402"/>
-                </a:lnTo>
-                <a:lnTo>
-                  <a:pt x="6786103" y="127834"/>
-                </a:lnTo>
-                <a:lnTo>
-                  <a:pt x="6839912" y="139794"/>
-                </a:lnTo>
-                <a:lnTo>
-                  <a:pt x="6893598" y="152281"/>
-                </a:lnTo>
-                <a:lnTo>
-                  <a:pt x="6947162" y="165295"/>
-                </a:lnTo>
-                <a:lnTo>
-                  <a:pt x="7000603" y="178837"/>
-                </a:lnTo>
-                <a:lnTo>
-                  <a:pt x="7023474" y="184871"/>
-                </a:lnTo>
-              </a:path>
-            </a:pathLst>
-          </a:custGeom>
-          <a:ln w="9524">
-            <a:solidFill>
-              <a:srgbClr val="FFFAF6"/>
-            </a:solidFill>
-          </a:ln>
-        </p:spPr>
-        <p:txBody>
-          <a:bodyPr wrap="square" lIns="0" tIns="0" rIns="0" bIns="0" rtlCol="0"/>
-          <a:lstStyle/>
-          <a:p>
-            <a:endParaRPr/>
-          </a:p>
-        </p:txBody>
-      </p:sp>
-      <p:sp>
-        <p:nvSpPr>
-          <p:cNvPr id="3" name="object 3"/>
-          <p:cNvSpPr txBox="1"/>
-          <p:nvPr/>
-        </p:nvSpPr>
-        <p:spPr>
-          <a:xfrm>
-            <a:off x="939800" y="9636125"/>
-            <a:ext cx="1128395" cy="162560"/>
-          </a:xfrm>
-          <a:prstGeom prst="rect">
-            <a:avLst/>
-          </a:prstGeom>
-        </p:spPr>
-        <p:txBody>
-          <a:bodyPr vert="horz" wrap="square" lIns="0" tIns="12700" rIns="0" bIns="0" rtlCol="0">
-            <a:spAutoFit/>
-          </a:bodyPr>
-          <a:lstStyle/>
-          <a:p>
-            <a:pPr marL="12700">
-              <a:lnSpc>
-                <a:spcPct val="100000"/>
-              </a:lnSpc>
-              <a:spcBef>
-                <a:spcPts val="100"/>
-              </a:spcBef>
-            </a:pPr>
-            <a:r>
-              <a:rPr sz="900" b="1" spc="65" dirty="0">
-                <a:solidFill>
-                  <a:srgbClr val="FEFBF9"/>
-                </a:solidFill>
-                <a:latin typeface="Consolas"/>
-                <a:cs typeface="Consolas"/>
-              </a:rPr>
-              <a:t>NIT-DEV  /  DROPEKO</a:t>
-            </a:r>
-            <a:r>
-              <a:rPr sz="900" b="1" spc="180" dirty="0">
-                <a:solidFill>
-                  <a:srgbClr val="FEFBF9"/>
-                </a:solidFill>
-                <a:latin typeface="Consolas"/>
-                <a:cs typeface="Consolas"/>
-              </a:rPr>
-              <a:t/>
-            </a:r>
-            <a:r>
-              <a:rPr sz="900" b="1" dirty="0">
-                <a:solidFill>
-                  <a:srgbClr val="FEFBF9"/>
-                </a:solidFill>
-                <a:latin typeface="Consolas"/>
-                <a:cs typeface="Consolas"/>
-              </a:rPr>
-              <a:t/>
-            </a:r>
-            <a:r>
-              <a:rPr sz="900" b="1" spc="185" dirty="0">
-                <a:solidFill>
-                  <a:srgbClr val="FEFBF9"/>
-                </a:solidFill>
-                <a:latin typeface="Consolas"/>
-                <a:cs typeface="Consolas"/>
-              </a:rPr>
-              <a:t/>
-            </a:r>
-            <a:r>
-              <a:rPr sz="900" b="1" spc="50" dirty="0">
-                <a:solidFill>
-                  <a:srgbClr val="FEFBF9"/>
-                </a:solidFill>
-                <a:latin typeface="Consolas"/>
-                <a:cs typeface="Consolas"/>
-              </a:rPr>
-              <a:t/>
-            </a:r>
-            <a:endParaRPr sz="900">
-              <a:latin typeface="Consolas"/>
-              <a:cs typeface="Consolas"/>
-            </a:endParaRPr>
-          </a:p>
-        </p:txBody>
-      </p:sp>
-      <p:sp>
-        <p:nvSpPr>
-          <p:cNvPr id="4" name="object 4"/>
-          <p:cNvSpPr txBox="1"/>
-          <p:nvPr/>
-        </p:nvSpPr>
-        <p:spPr>
-          <a:xfrm>
-            <a:off x="16134407" y="9636125"/>
-            <a:ext cx="1202690" cy="162560"/>
-          </a:xfrm>
-          <a:prstGeom prst="rect">
-            <a:avLst/>
-          </a:prstGeom>
-        </p:spPr>
-        <p:txBody>
-          <a:bodyPr vert="horz" wrap="square" lIns="0" tIns="12700" rIns="0" bIns="0" rtlCol="0">
-            <a:spAutoFit/>
-          </a:bodyPr>
-          <a:lstStyle/>
-          <a:p>
-            <a:pPr marL="12700">
-              <a:lnSpc>
-                <a:spcPct val="100000"/>
-              </a:lnSpc>
-              <a:spcBef>
-                <a:spcPts val="100"/>
-              </a:spcBef>
-            </a:pPr>
-            <a:r>
-              <a:rPr sz="900" b="1" spc="50" dirty="0">
-                <a:solidFill>
-                  <a:srgbClr val="FEFBF9"/>
-                </a:solidFill>
-                <a:latin typeface="Consolas"/>
-                <a:cs typeface="Consolas"/>
-              </a:rPr>
-              <a:t>ISQ DIGITAL LABS</a:t>
-            </a:r>
-            <a:r>
-              <a:rPr sz="900" b="1" spc="185" dirty="0">
-                <a:solidFill>
-                  <a:srgbClr val="FEFBF9"/>
-                </a:solidFill>
-                <a:latin typeface="Consolas"/>
-                <a:cs typeface="Consolas"/>
-              </a:rPr>
-              <a:t/>
-            </a:r>
-            <a:r>
-              <a:rPr sz="900" b="1" spc="65" dirty="0">
-                <a:solidFill>
-                  <a:srgbClr val="FEFBF9"/>
-                </a:solidFill>
-                <a:latin typeface="Consolas"/>
-                <a:cs typeface="Consolas"/>
-              </a:rPr>
-              <a:t/>
-            </a:r>
-            <a:r>
-              <a:rPr sz="900" b="1" spc="190" dirty="0">
-                <a:solidFill>
-                  <a:srgbClr val="FEFBF9"/>
-                </a:solidFill>
-                <a:latin typeface="Consolas"/>
-                <a:cs typeface="Consolas"/>
-              </a:rPr>
-              <a:t/>
-            </a:r>
-            <a:r>
-              <a:rPr sz="900" b="1" spc="35" dirty="0">
-                <a:solidFill>
-                  <a:srgbClr val="FEFBF9"/>
-                </a:solidFill>
-                <a:latin typeface="Consolas"/>
-                <a:cs typeface="Consolas"/>
-              </a:rPr>
-              <a:t/>
-            </a:r>
-            <a:endParaRPr sz="900">
-              <a:latin typeface="Consolas"/>
-              <a:cs typeface="Consolas"/>
-            </a:endParaRPr>
-          </a:p>
-        </p:txBody>
-      </p:sp>
-      <p:sp>
-        <p:nvSpPr>
-          <p:cNvPr id="5" name="object 5"/>
-          <p:cNvSpPr txBox="1"/>
-          <p:nvPr/>
-        </p:nvSpPr>
-        <p:spPr>
-          <a:xfrm>
-            <a:off x="5671343" y="3292475"/>
-            <a:ext cx="6945630" cy="3764915"/>
-          </a:xfrm>
-          <a:prstGeom prst="rect">
-            <a:avLst/>
-          </a:prstGeom>
-        </p:spPr>
-        <p:txBody>
-          <a:bodyPr vert="horz" wrap="square" lIns="0" tIns="15875" rIns="0" bIns="0" rtlCol="0">
-            <a:spAutoFit/>
-          </a:bodyPr>
-          <a:lstStyle/>
-          <a:p>
-            <a:pPr marR="8890" algn="ctr">
-              <a:lnSpc>
-                <a:spcPct val="100000"/>
-              </a:lnSpc>
-              <a:spcBef>
-                <a:spcPts val="125"/>
-              </a:spcBef>
-            </a:pPr>
-            <a:r>
-              <a:rPr sz="1100" b="1" spc="130" dirty="0">
-                <a:solidFill>
-                  <a:srgbClr val="D7806B"/>
-                </a:solidFill>
-                <a:latin typeface="Consolas"/>
-                <a:cs typeface="Consolas"/>
-              </a:rPr>
-              <a:t>PRÓXIMA DECISÃO</a:t>
-            </a:r>
-            <a:r>
-              <a:rPr sz="1100" b="1" spc="305" dirty="0">
-                <a:solidFill>
-                  <a:srgbClr val="D7806B"/>
-                </a:solidFill>
-                <a:latin typeface="Consolas"/>
-                <a:cs typeface="Consolas"/>
-              </a:rPr>
-              <a:t/>
-            </a:r>
-            <a:r>
-              <a:rPr sz="1100" b="1" spc="120" dirty="0">
-                <a:solidFill>
-                  <a:srgbClr val="D7806B"/>
-                </a:solidFill>
-                <a:latin typeface="Consolas"/>
-                <a:cs typeface="Consolas"/>
-              </a:rPr>
-              <a:t/>
-            </a:r>
-            <a:endParaRPr sz="1100">
-              <a:latin typeface="Consolas"/>
-              <a:cs typeface="Consolas"/>
-            </a:endParaRPr>
-          </a:p>
-          <a:p>
-            <a:pPr>
-              <a:lnSpc>
-                <a:spcPct val="100000"/>
-              </a:lnSpc>
-            </a:pPr>
-            <a:endParaRPr sz="1100">
-              <a:latin typeface="Consolas"/>
-              <a:cs typeface="Consolas"/>
-            </a:endParaRPr>
-          </a:p>
-          <a:p>
-            <a:pPr>
-              <a:lnSpc>
-                <a:spcPct val="100000"/>
-              </a:lnSpc>
-              <a:spcBef>
-                <a:spcPts val="140"/>
-              </a:spcBef>
-            </a:pPr>
-            <a:endParaRPr sz="1100">
-              <a:latin typeface="Consolas"/>
-              <a:cs typeface="Consolas"/>
-            </a:endParaRPr>
-          </a:p>
-          <a:p>
-            <a:pPr marL="12700" marR="5080" algn="ctr">
-              <a:lnSpc>
-                <a:spcPct val="76900"/>
-              </a:lnSpc>
-            </a:pPr>
-            <a:r>
-              <a:rPr sz="8700" b="1" dirty="0">
-                <a:solidFill>
-                  <a:srgbClr val="FFFAF6"/>
-                </a:solidFill>
-                <a:latin typeface="Georgia"/>
-                <a:cs typeface="Georgia"/>
-              </a:rPr>
-              <a:t>Liberar a TI.</a:t>
-            </a:r>
-            <a:r>
-              <a:rPr sz="8700" b="1" spc="-395" dirty="0">
-                <a:solidFill>
-                  <a:srgbClr val="FFFAF6"/>
-                </a:solidFill>
-                <a:latin typeface="Georgia"/>
-                <a:cs typeface="Georgia"/>
-              </a:rPr>
-              <a:t/>
-            </a:r>
-            <a:r>
-              <a:rPr sz="8700" b="1" spc="-50" dirty="0">
-                <a:solidFill>
-                  <a:srgbClr val="FFFAF6"/>
-                </a:solidFill>
-                <a:latin typeface="Georgia"/>
-                <a:cs typeface="Georgia"/>
-              </a:rPr>
-              <a:t/>
-            </a:r>
-            <a:r>
-              <a:rPr sz="8700" b="1" dirty="0">
-                <a:solidFill>
-                  <a:srgbClr val="FFFAF6"/>
-                </a:solidFill>
-                <a:latin typeface="Georgia"/>
-                <a:cs typeface="Georgia"/>
-              </a:rPr>
-              <a:t/>
-            </a:r>
-            <a:r>
-              <a:rPr sz="8700" b="1" spc="-10" dirty="0">
-                <a:solidFill>
-                  <a:srgbClr val="FFFAF6"/>
-                </a:solidFill>
-                <a:latin typeface="Georgia"/>
-                <a:cs typeface="Georgia"/>
-              </a:rPr>
-              <a:t/>
-            </a:r>
-            <a:endParaRPr sz="8700">
-              <a:latin typeface="Georgia"/>
-              <a:cs typeface="Georgia"/>
-            </a:endParaRPr>
-          </a:p>
-          <a:p>
-            <a:pPr marL="422275" marR="414655" algn="ctr">
-              <a:lnSpc>
-                <a:spcPct val="110100"/>
-              </a:lnSpc>
-              <a:spcBef>
-                <a:spcPts val="1005"/>
-              </a:spcBef>
-            </a:pPr>
-            <a:r>
-              <a:rPr sz="2100" dirty="0">
-                <a:solidFill>
-                  <a:srgbClr val="FEFAF7"/>
-                </a:solidFill>
-                <a:latin typeface="Segoe UI"/>
-                <a:cs typeface="Segoe UI"/>
-              </a:rPr>
-              <a:t>Com a rede liberada, o bench neural sai em uma tarde. Sem ela, a stack fica travada no piso do TF-IDF.</a:t>
-            </a:r>
-            <a:r>
-              <a:rPr sz="2100" spc="-20" dirty="0">
-                <a:solidFill>
-                  <a:srgbClr val="FEFAF7"/>
-                </a:solidFill>
-                <a:latin typeface="Segoe UI"/>
-                <a:cs typeface="Segoe UI"/>
-              </a:rPr>
-              <a:t/>
-            </a:r>
-            <a:r>
-              <a:rPr sz="2100" dirty="0">
-                <a:solidFill>
-                  <a:srgbClr val="FEFAF7"/>
-                </a:solidFill>
-                <a:latin typeface="Segoe UI"/>
-                <a:cs typeface="Segoe UI"/>
-              </a:rPr>
-              <a:t/>
-            </a:r>
-            <a:r>
-              <a:rPr sz="2100" spc="-15" dirty="0">
-                <a:solidFill>
-                  <a:srgbClr val="FEFAF7"/>
-                </a:solidFill>
-                <a:latin typeface="Segoe UI"/>
-                <a:cs typeface="Segoe UI"/>
-              </a:rPr>
-              <a:t/>
-            </a:r>
-            <a:r>
-              <a:rPr sz="2100" dirty="0">
-                <a:solidFill>
-                  <a:srgbClr val="FEFAF7"/>
-                </a:solidFill>
-                <a:latin typeface="Segoe UI"/>
-                <a:cs typeface="Segoe UI"/>
-              </a:rPr>
-              <a:t/>
-            </a:r>
-            <a:r>
-              <a:rPr sz="2100" spc="-15" dirty="0">
-                <a:solidFill>
-                  <a:srgbClr val="FEFAF7"/>
-                </a:solidFill>
-                <a:latin typeface="Segoe UI"/>
-                <a:cs typeface="Segoe UI"/>
-              </a:rPr>
-              <a:t/>
-            </a:r>
-            <a:r>
-              <a:rPr sz="2100" dirty="0">
-                <a:solidFill>
-                  <a:srgbClr val="FEFAF7"/>
-                </a:solidFill>
-                <a:latin typeface="Segoe UI"/>
-                <a:cs typeface="Segoe UI"/>
-              </a:rPr>
-              <a:t/>
-            </a:r>
-            <a:r>
-              <a:rPr sz="2100" spc="-15" dirty="0">
-                <a:solidFill>
-                  <a:srgbClr val="FEFAF7"/>
-                </a:solidFill>
-                <a:latin typeface="Segoe UI"/>
-                <a:cs typeface="Segoe UI"/>
-              </a:rPr>
-              <a:t/>
-            </a:r>
-            <a:r>
-              <a:rPr sz="2100" dirty="0">
-                <a:solidFill>
-                  <a:srgbClr val="FEFAF7"/>
-                </a:solidFill>
-                <a:latin typeface="Segoe UI"/>
-                <a:cs typeface="Segoe UI"/>
-              </a:rPr>
-              <a:t/>
-            </a:r>
-            <a:r>
-              <a:rPr sz="2100" spc="-15" dirty="0">
-                <a:solidFill>
-                  <a:srgbClr val="FEFAF7"/>
-                </a:solidFill>
-                <a:latin typeface="Segoe UI"/>
-                <a:cs typeface="Segoe UI"/>
-              </a:rPr>
-              <a:t/>
-            </a:r>
-            <a:r>
-              <a:rPr sz="2100" dirty="0">
-                <a:solidFill>
-                  <a:srgbClr val="FEFAF7"/>
-                </a:solidFill>
-                <a:latin typeface="Segoe UI"/>
-                <a:cs typeface="Segoe UI"/>
-              </a:rPr>
-              <a:t/>
-            </a:r>
-            <a:r>
-              <a:rPr sz="2100" spc="-15" dirty="0">
-                <a:solidFill>
-                  <a:srgbClr val="FEFAF7"/>
-                </a:solidFill>
-                <a:latin typeface="Segoe UI"/>
-                <a:cs typeface="Segoe UI"/>
-              </a:rPr>
-              <a:t/>
-            </a:r>
-            <a:r>
-              <a:rPr sz="2100" spc="-10" dirty="0">
-                <a:solidFill>
-                  <a:srgbClr val="FEFAF7"/>
-                </a:solidFill>
-                <a:latin typeface="Segoe UI"/>
-                <a:cs typeface="Segoe UI"/>
-              </a:rPr>
-              <a:t/>
-            </a:r>
-            <a:r>
-              <a:rPr sz="2100" dirty="0">
-                <a:solidFill>
-                  <a:srgbClr val="FEFAF7"/>
-                </a:solidFill>
-                <a:latin typeface="Segoe UI"/>
-                <a:cs typeface="Segoe UI"/>
-              </a:rPr>
-              <a:t/>
-            </a:r>
-            <a:r>
-              <a:rPr sz="2100" spc="-15" dirty="0">
-                <a:solidFill>
-                  <a:srgbClr val="FEFAF7"/>
-                </a:solidFill>
-                <a:latin typeface="Segoe UI"/>
-                <a:cs typeface="Segoe UI"/>
-              </a:rPr>
-              <a:t/>
-            </a:r>
-            <a:r>
-              <a:rPr sz="2100" dirty="0">
-                <a:solidFill>
-                  <a:srgbClr val="FEFAF7"/>
-                </a:solidFill>
-                <a:latin typeface="Segoe UI"/>
-                <a:cs typeface="Segoe UI"/>
-              </a:rPr>
-              <a:t/>
-            </a:r>
-            <a:r>
-              <a:rPr sz="2100" spc="-10" dirty="0">
-                <a:solidFill>
-                  <a:srgbClr val="FEFAF7"/>
-                </a:solidFill>
-                <a:latin typeface="Segoe UI"/>
-                <a:cs typeface="Segoe UI"/>
-              </a:rPr>
-              <a:t/>
-            </a:r>
-            <a:r>
-              <a:rPr sz="2100" dirty="0">
-                <a:solidFill>
-                  <a:srgbClr val="FEFAF7"/>
-                </a:solidFill>
-                <a:latin typeface="Segoe UI"/>
-                <a:cs typeface="Segoe UI"/>
-              </a:rPr>
-              <a:t/>
-            </a:r>
-            <a:r>
-              <a:rPr sz="2100" spc="-10" dirty="0">
-                <a:solidFill>
-                  <a:srgbClr val="FEFAF7"/>
-                </a:solidFill>
-                <a:latin typeface="Segoe UI"/>
-                <a:cs typeface="Segoe UI"/>
-              </a:rPr>
-              <a:t/>
-            </a:r>
-            <a:r>
-              <a:rPr sz="2100" dirty="0">
-                <a:solidFill>
-                  <a:srgbClr val="FEFAF7"/>
-                </a:solidFill>
-                <a:latin typeface="Segoe UI"/>
-                <a:cs typeface="Segoe UI"/>
-              </a:rPr>
-              <a:t/>
-            </a:r>
-            <a:r>
-              <a:rPr sz="2100" spc="-10" dirty="0">
-                <a:solidFill>
-                  <a:srgbClr val="FEFAF7"/>
-                </a:solidFill>
-                <a:latin typeface="Segoe UI"/>
-                <a:cs typeface="Segoe UI"/>
-              </a:rPr>
-              <a:t/>
-            </a:r>
-            <a:r>
-              <a:rPr sz="2100" dirty="0">
-                <a:solidFill>
-                  <a:srgbClr val="FEFAF7"/>
-                </a:solidFill>
-                <a:latin typeface="Segoe UI"/>
-                <a:cs typeface="Segoe UI"/>
-              </a:rPr>
-              <a:t/>
-            </a:r>
-            <a:r>
-              <a:rPr sz="2100" spc="-15" dirty="0">
-                <a:solidFill>
-                  <a:srgbClr val="FEFAF7"/>
-                </a:solidFill>
-                <a:latin typeface="Segoe UI"/>
-                <a:cs typeface="Segoe UI"/>
-              </a:rPr>
-              <a:t/>
-            </a:r>
-            <a:r>
-              <a:rPr sz="2100" dirty="0">
-                <a:solidFill>
-                  <a:srgbClr val="FEFAF7"/>
-                </a:solidFill>
-                <a:latin typeface="Segoe UI"/>
-                <a:cs typeface="Segoe UI"/>
-              </a:rPr>
-              <a:t/>
-            </a:r>
-            <a:r>
-              <a:rPr sz="2100" spc="-10" dirty="0">
-                <a:solidFill>
-                  <a:srgbClr val="FEFAF7"/>
-                </a:solidFill>
-                <a:latin typeface="Segoe UI"/>
-                <a:cs typeface="Segoe UI"/>
-              </a:rPr>
-              <a:t/>
-            </a:r>
-            <a:r>
-              <a:rPr sz="2100" spc="-25" dirty="0">
-                <a:solidFill>
-                  <a:srgbClr val="FEFAF7"/>
-                </a:solidFill>
-                <a:latin typeface="Segoe UI"/>
-                <a:cs typeface="Segoe UI"/>
-              </a:rPr>
-              <a:t/>
-            </a:r>
-            <a:r>
-              <a:rPr sz="2100" dirty="0">
-                <a:solidFill>
-                  <a:srgbClr val="FEFAF7"/>
-                </a:solidFill>
-                <a:latin typeface="Segoe UI"/>
-                <a:cs typeface="Segoe UI"/>
-              </a:rPr>
-              <a:t/>
-            </a:r>
-            <a:r>
-              <a:rPr sz="2100" spc="-10" dirty="0">
-                <a:solidFill>
-                  <a:srgbClr val="FEFAF7"/>
-                </a:solidFill>
-                <a:latin typeface="Segoe UI"/>
-                <a:cs typeface="Segoe UI"/>
-              </a:rPr>
-              <a:t/>
-            </a:r>
-            <a:endParaRPr sz="2100">
-              <a:latin typeface="Segoe UI"/>
-              <a:cs typeface="Segoe UI"/>
-            </a:endParaRPr>
-          </a:p>
-        </p:txBody>
-      </p:sp>
-      <p:sp>
-        <p:nvSpPr>
-          <p:cNvPr id="6" name="object 6"/>
-          <p:cNvSpPr/>
-          <p:nvPr/>
-        </p:nvSpPr>
-        <p:spPr>
-          <a:xfrm>
-            <a:off x="666750" y="495324"/>
-            <a:ext cx="552450" cy="533400"/>
-          </a:xfrm>
-          <a:custGeom>
-            <a:avLst/>
-            <a:gdLst/>
-            <a:ahLst/>
-            <a:cxnLst/>
-            <a:rect l="l" t="t" r="r" b="b"/>
-            <a:pathLst>
-              <a:path w="552450" h="533400">
-                <a:moveTo>
-                  <a:pt x="122948" y="197192"/>
-                </a:moveTo>
-                <a:lnTo>
-                  <a:pt x="122936" y="183692"/>
-                </a:lnTo>
-                <a:lnTo>
-                  <a:pt x="122923" y="145529"/>
-                </a:lnTo>
-                <a:lnTo>
-                  <a:pt x="66687" y="145529"/>
-                </a:lnTo>
-                <a:lnTo>
-                  <a:pt x="66636" y="145808"/>
-                </a:lnTo>
-                <a:lnTo>
-                  <a:pt x="66586" y="146088"/>
-                </a:lnTo>
-                <a:lnTo>
-                  <a:pt x="66560" y="146367"/>
-                </a:lnTo>
-                <a:lnTo>
-                  <a:pt x="66586" y="158800"/>
-                </a:lnTo>
-                <a:lnTo>
-                  <a:pt x="66586" y="171221"/>
-                </a:lnTo>
-                <a:lnTo>
-                  <a:pt x="66586" y="183654"/>
-                </a:lnTo>
-                <a:lnTo>
-                  <a:pt x="66560" y="197472"/>
-                </a:lnTo>
-                <a:lnTo>
-                  <a:pt x="67144" y="197650"/>
-                </a:lnTo>
-                <a:lnTo>
-                  <a:pt x="81508" y="197624"/>
-                </a:lnTo>
-                <a:lnTo>
-                  <a:pt x="94742" y="197624"/>
-                </a:lnTo>
-                <a:lnTo>
-                  <a:pt x="107975" y="197624"/>
-                </a:lnTo>
-                <a:lnTo>
-                  <a:pt x="122618" y="197650"/>
-                </a:lnTo>
-                <a:lnTo>
-                  <a:pt x="122948" y="197192"/>
-                </a:lnTo>
-                <a:close/>
-              </a:path>
-              <a:path w="552450" h="533400">
-                <a:moveTo>
-                  <a:pt x="123532" y="344055"/>
-                </a:moveTo>
-                <a:lnTo>
-                  <a:pt x="123520" y="221259"/>
-                </a:lnTo>
-                <a:lnTo>
-                  <a:pt x="123431" y="219989"/>
-                </a:lnTo>
-                <a:lnTo>
-                  <a:pt x="67271" y="219989"/>
-                </a:lnTo>
-                <a:lnTo>
-                  <a:pt x="67271" y="221259"/>
-                </a:lnTo>
-                <a:lnTo>
-                  <a:pt x="67271" y="344055"/>
-                </a:lnTo>
-                <a:lnTo>
-                  <a:pt x="67271" y="386270"/>
-                </a:lnTo>
-                <a:lnTo>
-                  <a:pt x="123532" y="386270"/>
-                </a:lnTo>
-                <a:lnTo>
-                  <a:pt x="123532" y="344055"/>
-                </a:lnTo>
-                <a:close/>
-              </a:path>
-              <a:path w="552450" h="533400">
-                <a:moveTo>
-                  <a:pt x="480593" y="183438"/>
-                </a:moveTo>
-                <a:lnTo>
-                  <a:pt x="450062" y="150075"/>
-                </a:lnTo>
-                <a:lnTo>
-                  <a:pt x="437489" y="145567"/>
-                </a:lnTo>
-                <a:lnTo>
-                  <a:pt x="430809" y="145567"/>
-                </a:lnTo>
-                <a:lnTo>
-                  <a:pt x="404495" y="145503"/>
-                </a:lnTo>
-                <a:lnTo>
-                  <a:pt x="378167" y="145478"/>
-                </a:lnTo>
-                <a:lnTo>
-                  <a:pt x="325513" y="145440"/>
-                </a:lnTo>
-                <a:lnTo>
-                  <a:pt x="321614" y="145364"/>
-                </a:lnTo>
-                <a:lnTo>
-                  <a:pt x="287820" y="165519"/>
-                </a:lnTo>
-                <a:lnTo>
-                  <a:pt x="278726" y="187248"/>
-                </a:lnTo>
-                <a:lnTo>
-                  <a:pt x="278726" y="297878"/>
-                </a:lnTo>
-                <a:lnTo>
-                  <a:pt x="278663" y="298615"/>
-                </a:lnTo>
-                <a:lnTo>
-                  <a:pt x="278625" y="299364"/>
-                </a:lnTo>
-                <a:lnTo>
-                  <a:pt x="278307" y="299364"/>
-                </a:lnTo>
-                <a:lnTo>
-                  <a:pt x="276961" y="297053"/>
-                </a:lnTo>
-                <a:lnTo>
-                  <a:pt x="275704" y="294678"/>
-                </a:lnTo>
-                <a:lnTo>
-                  <a:pt x="274256" y="292417"/>
-                </a:lnTo>
-                <a:lnTo>
-                  <a:pt x="247827" y="264109"/>
-                </a:lnTo>
-                <a:lnTo>
-                  <a:pt x="210273" y="234708"/>
-                </a:lnTo>
-                <a:lnTo>
-                  <a:pt x="203962" y="229806"/>
-                </a:lnTo>
-                <a:lnTo>
-                  <a:pt x="199237" y="226009"/>
-                </a:lnTo>
-                <a:lnTo>
-                  <a:pt x="194716" y="221970"/>
-                </a:lnTo>
-                <a:lnTo>
-                  <a:pt x="190423" y="217665"/>
-                </a:lnTo>
-                <a:lnTo>
-                  <a:pt x="187388" y="214668"/>
-                </a:lnTo>
-                <a:lnTo>
-                  <a:pt x="186080" y="210832"/>
-                </a:lnTo>
-                <a:lnTo>
-                  <a:pt x="187680" y="206489"/>
-                </a:lnTo>
-                <a:lnTo>
-                  <a:pt x="189357" y="201904"/>
-                </a:lnTo>
-                <a:lnTo>
-                  <a:pt x="194170" y="198640"/>
-                </a:lnTo>
-                <a:lnTo>
-                  <a:pt x="199059" y="198640"/>
-                </a:lnTo>
-                <a:lnTo>
-                  <a:pt x="224104" y="198602"/>
-                </a:lnTo>
-                <a:lnTo>
-                  <a:pt x="236626" y="198628"/>
-                </a:lnTo>
-                <a:lnTo>
-                  <a:pt x="249148" y="198755"/>
-                </a:lnTo>
-                <a:lnTo>
-                  <a:pt x="252907" y="198805"/>
-                </a:lnTo>
-                <a:lnTo>
-                  <a:pt x="254647" y="197726"/>
-                </a:lnTo>
-                <a:lnTo>
-                  <a:pt x="256209" y="194221"/>
-                </a:lnTo>
-                <a:lnTo>
-                  <a:pt x="261188" y="183197"/>
-                </a:lnTo>
-                <a:lnTo>
-                  <a:pt x="266255" y="172212"/>
-                </a:lnTo>
-                <a:lnTo>
-                  <a:pt x="276491" y="150279"/>
-                </a:lnTo>
-                <a:lnTo>
-                  <a:pt x="277164" y="148805"/>
-                </a:lnTo>
-                <a:lnTo>
-                  <a:pt x="277837" y="147281"/>
-                </a:lnTo>
-                <a:lnTo>
-                  <a:pt x="278625" y="145542"/>
-                </a:lnTo>
-                <a:lnTo>
-                  <a:pt x="241503" y="145503"/>
-                </a:lnTo>
-                <a:lnTo>
-                  <a:pt x="202260" y="145491"/>
-                </a:lnTo>
-                <a:lnTo>
-                  <a:pt x="197904" y="145453"/>
-                </a:lnTo>
-                <a:lnTo>
-                  <a:pt x="193636" y="145834"/>
-                </a:lnTo>
-                <a:lnTo>
-                  <a:pt x="153873" y="168503"/>
-                </a:lnTo>
-                <a:lnTo>
-                  <a:pt x="138112" y="204647"/>
-                </a:lnTo>
-                <a:lnTo>
-                  <a:pt x="137452" y="215163"/>
-                </a:lnTo>
-                <a:lnTo>
-                  <a:pt x="138480" y="225907"/>
-                </a:lnTo>
-                <a:lnTo>
-                  <a:pt x="162344" y="263474"/>
-                </a:lnTo>
-                <a:lnTo>
-                  <a:pt x="195173" y="291058"/>
-                </a:lnTo>
-                <a:lnTo>
-                  <a:pt x="217906" y="308648"/>
-                </a:lnTo>
-                <a:lnTo>
-                  <a:pt x="225132" y="316661"/>
-                </a:lnTo>
-                <a:lnTo>
-                  <a:pt x="228269" y="320776"/>
-                </a:lnTo>
-                <a:lnTo>
-                  <a:pt x="230314" y="330123"/>
-                </a:lnTo>
-                <a:lnTo>
-                  <a:pt x="228612" y="333400"/>
-                </a:lnTo>
-                <a:lnTo>
-                  <a:pt x="224751" y="334606"/>
-                </a:lnTo>
-                <a:lnTo>
-                  <a:pt x="223113" y="335089"/>
-                </a:lnTo>
-                <a:lnTo>
-                  <a:pt x="221437" y="335318"/>
-                </a:lnTo>
-                <a:lnTo>
-                  <a:pt x="219722" y="335292"/>
-                </a:lnTo>
-                <a:lnTo>
-                  <a:pt x="127330" y="335292"/>
-                </a:lnTo>
-                <a:lnTo>
-                  <a:pt x="165176" y="367677"/>
-                </a:lnTo>
-                <a:lnTo>
-                  <a:pt x="184759" y="384225"/>
-                </a:lnTo>
-                <a:lnTo>
-                  <a:pt x="186118" y="385724"/>
-                </a:lnTo>
-                <a:lnTo>
-                  <a:pt x="187769" y="386397"/>
-                </a:lnTo>
-                <a:lnTo>
-                  <a:pt x="193929" y="388810"/>
-                </a:lnTo>
-                <a:lnTo>
-                  <a:pt x="200304" y="390296"/>
-                </a:lnTo>
-                <a:lnTo>
-                  <a:pt x="206883" y="390867"/>
-                </a:lnTo>
-                <a:lnTo>
-                  <a:pt x="213563" y="391528"/>
-                </a:lnTo>
-                <a:lnTo>
-                  <a:pt x="255003" y="377659"/>
-                </a:lnTo>
-                <a:lnTo>
-                  <a:pt x="277266" y="346849"/>
-                </a:lnTo>
-                <a:lnTo>
-                  <a:pt x="278917" y="342950"/>
-                </a:lnTo>
-                <a:lnTo>
-                  <a:pt x="279374" y="344424"/>
-                </a:lnTo>
-                <a:lnTo>
-                  <a:pt x="279755" y="345871"/>
-                </a:lnTo>
-                <a:lnTo>
-                  <a:pt x="280289" y="347294"/>
-                </a:lnTo>
-                <a:lnTo>
-                  <a:pt x="282486" y="353326"/>
-                </a:lnTo>
-                <a:lnTo>
-                  <a:pt x="285877" y="358635"/>
-                </a:lnTo>
-                <a:lnTo>
-                  <a:pt x="289775" y="363664"/>
-                </a:lnTo>
-                <a:lnTo>
-                  <a:pt x="294716" y="370103"/>
-                </a:lnTo>
-                <a:lnTo>
-                  <a:pt x="300532" y="375615"/>
-                </a:lnTo>
-                <a:lnTo>
-                  <a:pt x="307200" y="380174"/>
-                </a:lnTo>
-                <a:lnTo>
-                  <a:pt x="312813" y="383997"/>
-                </a:lnTo>
-                <a:lnTo>
-                  <a:pt x="318833" y="386867"/>
-                </a:lnTo>
-                <a:lnTo>
-                  <a:pt x="394296" y="386867"/>
-                </a:lnTo>
-                <a:lnTo>
-                  <a:pt x="394195" y="386410"/>
-                </a:lnTo>
-                <a:lnTo>
-                  <a:pt x="393966" y="386029"/>
-                </a:lnTo>
-                <a:lnTo>
-                  <a:pt x="393598" y="385749"/>
-                </a:lnTo>
-                <a:lnTo>
-                  <a:pt x="357047" y="355981"/>
-                </a:lnTo>
-                <a:lnTo>
-                  <a:pt x="345846" y="346824"/>
-                </a:lnTo>
-                <a:lnTo>
-                  <a:pt x="340233" y="342277"/>
-                </a:lnTo>
-                <a:lnTo>
-                  <a:pt x="334594" y="337769"/>
-                </a:lnTo>
-                <a:lnTo>
-                  <a:pt x="332778" y="336321"/>
-                </a:lnTo>
-                <a:lnTo>
-                  <a:pt x="331952" y="334924"/>
-                </a:lnTo>
-                <a:lnTo>
-                  <a:pt x="332016" y="303568"/>
-                </a:lnTo>
-                <a:lnTo>
-                  <a:pt x="332041" y="245719"/>
-                </a:lnTo>
-                <a:lnTo>
-                  <a:pt x="332066" y="216789"/>
-                </a:lnTo>
-                <a:lnTo>
-                  <a:pt x="339229" y="198234"/>
-                </a:lnTo>
-                <a:lnTo>
-                  <a:pt x="346557" y="198285"/>
-                </a:lnTo>
-                <a:lnTo>
-                  <a:pt x="363232" y="198348"/>
-                </a:lnTo>
-                <a:lnTo>
-                  <a:pt x="379895" y="198361"/>
-                </a:lnTo>
-                <a:lnTo>
-                  <a:pt x="415696" y="198348"/>
-                </a:lnTo>
-                <a:lnTo>
-                  <a:pt x="417995" y="198970"/>
-                </a:lnTo>
-                <a:lnTo>
-                  <a:pt x="420128" y="200215"/>
-                </a:lnTo>
-                <a:lnTo>
-                  <a:pt x="424865" y="202933"/>
-                </a:lnTo>
-                <a:lnTo>
-                  <a:pt x="427240" y="207098"/>
-                </a:lnTo>
-                <a:lnTo>
-                  <a:pt x="427253" y="263131"/>
-                </a:lnTo>
-                <a:lnTo>
-                  <a:pt x="427240" y="317906"/>
-                </a:lnTo>
-                <a:lnTo>
-                  <a:pt x="427253" y="322211"/>
-                </a:lnTo>
-                <a:lnTo>
-                  <a:pt x="426872" y="326453"/>
-                </a:lnTo>
-                <a:lnTo>
-                  <a:pt x="426567" y="329133"/>
-                </a:lnTo>
-                <a:lnTo>
-                  <a:pt x="425932" y="331724"/>
-                </a:lnTo>
-                <a:lnTo>
-                  <a:pt x="424954" y="334225"/>
-                </a:lnTo>
-                <a:lnTo>
-                  <a:pt x="424192" y="336232"/>
-                </a:lnTo>
-                <a:lnTo>
-                  <a:pt x="416852" y="333286"/>
-                </a:lnTo>
-                <a:lnTo>
-                  <a:pt x="370776" y="297510"/>
-                </a:lnTo>
-                <a:lnTo>
-                  <a:pt x="367487" y="295008"/>
-                </a:lnTo>
-                <a:lnTo>
-                  <a:pt x="337883" y="331393"/>
-                </a:lnTo>
-                <a:lnTo>
-                  <a:pt x="338416" y="331838"/>
-                </a:lnTo>
-                <a:lnTo>
-                  <a:pt x="338836" y="332206"/>
-                </a:lnTo>
-                <a:lnTo>
-                  <a:pt x="361061" y="349427"/>
-                </a:lnTo>
-                <a:lnTo>
-                  <a:pt x="372745" y="358521"/>
-                </a:lnTo>
-                <a:lnTo>
-                  <a:pt x="384429" y="367614"/>
-                </a:lnTo>
-                <a:lnTo>
-                  <a:pt x="416941" y="386892"/>
-                </a:lnTo>
-                <a:lnTo>
-                  <a:pt x="427634" y="386702"/>
-                </a:lnTo>
-                <a:lnTo>
-                  <a:pt x="435102" y="386842"/>
-                </a:lnTo>
-                <a:lnTo>
-                  <a:pt x="471982" y="368998"/>
-                </a:lnTo>
-                <a:lnTo>
-                  <a:pt x="480555" y="303669"/>
-                </a:lnTo>
-                <a:lnTo>
-                  <a:pt x="480580" y="265252"/>
-                </a:lnTo>
-                <a:lnTo>
-                  <a:pt x="480568" y="226834"/>
-                </a:lnTo>
-                <a:lnTo>
-                  <a:pt x="480593" y="183438"/>
-                </a:lnTo>
-                <a:close/>
-              </a:path>
-              <a:path w="552450" h="533400">
-                <a:moveTo>
-                  <a:pt x="552348" y="260350"/>
-                </a:moveTo>
-                <a:lnTo>
-                  <a:pt x="551992" y="234950"/>
-                </a:lnTo>
-                <a:lnTo>
-                  <a:pt x="551865" y="229870"/>
-                </a:lnTo>
-                <a:lnTo>
-                  <a:pt x="551751" y="224790"/>
-                </a:lnTo>
-                <a:lnTo>
-                  <a:pt x="551688" y="222250"/>
-                </a:lnTo>
-                <a:lnTo>
-                  <a:pt x="551383" y="209550"/>
-                </a:lnTo>
-                <a:lnTo>
-                  <a:pt x="551294" y="207010"/>
-                </a:lnTo>
-                <a:lnTo>
-                  <a:pt x="551218" y="203200"/>
-                </a:lnTo>
-                <a:lnTo>
-                  <a:pt x="549529" y="166370"/>
-                </a:lnTo>
-                <a:lnTo>
-                  <a:pt x="548386" y="148590"/>
-                </a:lnTo>
-                <a:lnTo>
-                  <a:pt x="547306" y="137160"/>
-                </a:lnTo>
-                <a:lnTo>
-                  <a:pt x="546900" y="130810"/>
-                </a:lnTo>
-                <a:lnTo>
-                  <a:pt x="531622" y="90170"/>
-                </a:lnTo>
-                <a:lnTo>
-                  <a:pt x="525653" y="82588"/>
-                </a:lnTo>
-                <a:lnTo>
-                  <a:pt x="525653" y="214630"/>
-                </a:lnTo>
-                <a:lnTo>
-                  <a:pt x="525538" y="327660"/>
-                </a:lnTo>
-                <a:lnTo>
-                  <a:pt x="525411" y="331470"/>
-                </a:lnTo>
-                <a:lnTo>
-                  <a:pt x="525335" y="334010"/>
-                </a:lnTo>
-                <a:lnTo>
-                  <a:pt x="524929" y="346710"/>
-                </a:lnTo>
-                <a:lnTo>
-                  <a:pt x="524827" y="349250"/>
-                </a:lnTo>
-                <a:lnTo>
-                  <a:pt x="524776" y="350520"/>
-                </a:lnTo>
-                <a:lnTo>
-                  <a:pt x="524510" y="356870"/>
-                </a:lnTo>
-                <a:lnTo>
-                  <a:pt x="519823" y="400050"/>
-                </a:lnTo>
-                <a:lnTo>
-                  <a:pt x="500481" y="435610"/>
-                </a:lnTo>
-                <a:lnTo>
-                  <a:pt x="463130" y="463550"/>
-                </a:lnTo>
-                <a:lnTo>
-                  <a:pt x="452526" y="468630"/>
-                </a:lnTo>
-                <a:lnTo>
-                  <a:pt x="441718" y="474980"/>
-                </a:lnTo>
-                <a:lnTo>
-                  <a:pt x="430707" y="478790"/>
-                </a:lnTo>
-                <a:lnTo>
-                  <a:pt x="419506" y="483870"/>
-                </a:lnTo>
-                <a:lnTo>
-                  <a:pt x="408774" y="487680"/>
-                </a:lnTo>
-                <a:lnTo>
-                  <a:pt x="397954" y="490220"/>
-                </a:lnTo>
-                <a:lnTo>
-                  <a:pt x="387007" y="494030"/>
-                </a:lnTo>
-                <a:lnTo>
-                  <a:pt x="375958" y="496570"/>
-                </a:lnTo>
-                <a:lnTo>
-                  <a:pt x="341655" y="502920"/>
-                </a:lnTo>
-                <a:lnTo>
-                  <a:pt x="334606" y="502920"/>
-                </a:lnTo>
-                <a:lnTo>
-                  <a:pt x="327583" y="504190"/>
-                </a:lnTo>
-                <a:lnTo>
-                  <a:pt x="316623" y="505460"/>
-                </a:lnTo>
-                <a:lnTo>
-                  <a:pt x="255600" y="505460"/>
-                </a:lnTo>
-                <a:lnTo>
-                  <a:pt x="248805" y="504190"/>
-                </a:lnTo>
-                <a:lnTo>
-                  <a:pt x="242011" y="504190"/>
-                </a:lnTo>
-                <a:lnTo>
-                  <a:pt x="227660" y="502920"/>
-                </a:lnTo>
-                <a:lnTo>
-                  <a:pt x="220052" y="501650"/>
-                </a:lnTo>
-                <a:lnTo>
-                  <a:pt x="203339" y="499110"/>
-                </a:lnTo>
-                <a:lnTo>
-                  <a:pt x="194144" y="497840"/>
-                </a:lnTo>
-                <a:lnTo>
-                  <a:pt x="184950" y="495300"/>
-                </a:lnTo>
-                <a:lnTo>
-                  <a:pt x="175793" y="494030"/>
-                </a:lnTo>
-                <a:lnTo>
-                  <a:pt x="164045" y="491490"/>
-                </a:lnTo>
-                <a:lnTo>
-                  <a:pt x="152387" y="487680"/>
-                </a:lnTo>
-                <a:lnTo>
-                  <a:pt x="140843" y="485140"/>
-                </a:lnTo>
-                <a:lnTo>
-                  <a:pt x="129387" y="481330"/>
-                </a:lnTo>
-                <a:lnTo>
-                  <a:pt x="117944" y="476250"/>
-                </a:lnTo>
-                <a:lnTo>
-                  <a:pt x="106718" y="472440"/>
-                </a:lnTo>
-                <a:lnTo>
-                  <a:pt x="70916" y="450850"/>
-                </a:lnTo>
-                <a:lnTo>
-                  <a:pt x="43624" y="420370"/>
-                </a:lnTo>
-                <a:lnTo>
-                  <a:pt x="31584" y="373380"/>
-                </a:lnTo>
-                <a:lnTo>
-                  <a:pt x="30924" y="367030"/>
-                </a:lnTo>
-                <a:lnTo>
-                  <a:pt x="30010" y="355600"/>
-                </a:lnTo>
-                <a:lnTo>
-                  <a:pt x="29629" y="349250"/>
-                </a:lnTo>
-                <a:lnTo>
-                  <a:pt x="28613" y="334010"/>
-                </a:lnTo>
-                <a:lnTo>
-                  <a:pt x="26695" y="290830"/>
-                </a:lnTo>
-                <a:lnTo>
-                  <a:pt x="26479" y="229870"/>
-                </a:lnTo>
-                <a:lnTo>
-                  <a:pt x="27025" y="214630"/>
-                </a:lnTo>
-                <a:lnTo>
-                  <a:pt x="27381" y="205740"/>
-                </a:lnTo>
-                <a:lnTo>
-                  <a:pt x="27470" y="204470"/>
-                </a:lnTo>
-                <a:lnTo>
-                  <a:pt x="27559" y="203200"/>
-                </a:lnTo>
-                <a:lnTo>
-                  <a:pt x="28994" y="182880"/>
-                </a:lnTo>
-                <a:lnTo>
-                  <a:pt x="29629" y="175260"/>
-                </a:lnTo>
-                <a:lnTo>
-                  <a:pt x="29756" y="173990"/>
-                </a:lnTo>
-                <a:lnTo>
-                  <a:pt x="30391" y="167640"/>
-                </a:lnTo>
-                <a:lnTo>
-                  <a:pt x="31546" y="158750"/>
-                </a:lnTo>
-                <a:lnTo>
-                  <a:pt x="32791" y="148590"/>
-                </a:lnTo>
-                <a:lnTo>
-                  <a:pt x="34112" y="139700"/>
-                </a:lnTo>
-                <a:lnTo>
-                  <a:pt x="47066" y="100330"/>
-                </a:lnTo>
-                <a:lnTo>
-                  <a:pt x="60299" y="86360"/>
-                </a:lnTo>
-                <a:lnTo>
-                  <a:pt x="67284" y="80010"/>
-                </a:lnTo>
-                <a:lnTo>
-                  <a:pt x="105943" y="58420"/>
-                </a:lnTo>
-                <a:lnTo>
-                  <a:pt x="164934" y="38100"/>
-                </a:lnTo>
-                <a:lnTo>
-                  <a:pt x="173329" y="36830"/>
-                </a:lnTo>
-                <a:lnTo>
-                  <a:pt x="181787" y="34290"/>
-                </a:lnTo>
-                <a:lnTo>
-                  <a:pt x="198755" y="31750"/>
-                </a:lnTo>
-                <a:lnTo>
-                  <a:pt x="212191" y="29210"/>
-                </a:lnTo>
-                <a:lnTo>
-                  <a:pt x="218935" y="29210"/>
-                </a:lnTo>
-                <a:lnTo>
-                  <a:pt x="232689" y="26670"/>
-                </a:lnTo>
-                <a:lnTo>
-                  <a:pt x="239687" y="26670"/>
-                </a:lnTo>
-                <a:lnTo>
-                  <a:pt x="253720" y="25400"/>
-                </a:lnTo>
-                <a:lnTo>
-                  <a:pt x="264337" y="24130"/>
-                </a:lnTo>
-                <a:lnTo>
-                  <a:pt x="285584" y="24130"/>
-                </a:lnTo>
-                <a:lnTo>
-                  <a:pt x="296214" y="25400"/>
-                </a:lnTo>
-                <a:lnTo>
-                  <a:pt x="309359" y="25400"/>
-                </a:lnTo>
-                <a:lnTo>
-                  <a:pt x="315925" y="26670"/>
-                </a:lnTo>
-                <a:lnTo>
-                  <a:pt x="322491" y="26670"/>
-                </a:lnTo>
-                <a:lnTo>
-                  <a:pt x="344030" y="29210"/>
-                </a:lnTo>
-                <a:lnTo>
-                  <a:pt x="354736" y="31750"/>
-                </a:lnTo>
-                <a:lnTo>
-                  <a:pt x="365417" y="33020"/>
-                </a:lnTo>
-                <a:lnTo>
-                  <a:pt x="379183" y="35560"/>
-                </a:lnTo>
-                <a:lnTo>
-                  <a:pt x="406387" y="43180"/>
-                </a:lnTo>
-                <a:lnTo>
-                  <a:pt x="419798" y="48260"/>
-                </a:lnTo>
-                <a:lnTo>
-                  <a:pt x="451815" y="59690"/>
-                </a:lnTo>
-                <a:lnTo>
-                  <a:pt x="491159" y="85090"/>
-                </a:lnTo>
-                <a:lnTo>
-                  <a:pt x="516623" y="120650"/>
-                </a:lnTo>
-                <a:lnTo>
-                  <a:pt x="522528" y="148590"/>
-                </a:lnTo>
-                <a:lnTo>
-                  <a:pt x="522592" y="149860"/>
-                </a:lnTo>
-                <a:lnTo>
-                  <a:pt x="522986" y="156210"/>
-                </a:lnTo>
-                <a:lnTo>
-                  <a:pt x="523557" y="162560"/>
-                </a:lnTo>
-                <a:lnTo>
-                  <a:pt x="524281" y="173990"/>
-                </a:lnTo>
-                <a:lnTo>
-                  <a:pt x="524395" y="176530"/>
-                </a:lnTo>
-                <a:lnTo>
-                  <a:pt x="524522" y="179070"/>
-                </a:lnTo>
-                <a:lnTo>
-                  <a:pt x="524649" y="182880"/>
-                </a:lnTo>
-                <a:lnTo>
-                  <a:pt x="525513" y="209550"/>
-                </a:lnTo>
-                <a:lnTo>
-                  <a:pt x="525653" y="214630"/>
-                </a:lnTo>
-                <a:lnTo>
-                  <a:pt x="525653" y="82588"/>
-                </a:lnTo>
-                <a:lnTo>
-                  <a:pt x="497395" y="54610"/>
-                </a:lnTo>
-                <a:lnTo>
-                  <a:pt x="459701" y="35560"/>
-                </a:lnTo>
-                <a:lnTo>
-                  <a:pt x="451599" y="31750"/>
-                </a:lnTo>
-                <a:lnTo>
-                  <a:pt x="439458" y="27940"/>
-                </a:lnTo>
-                <a:lnTo>
-                  <a:pt x="430263" y="24130"/>
-                </a:lnTo>
-                <a:lnTo>
-                  <a:pt x="427202" y="22860"/>
-                </a:lnTo>
-                <a:lnTo>
-                  <a:pt x="402336" y="15240"/>
-                </a:lnTo>
-                <a:lnTo>
-                  <a:pt x="388023" y="12700"/>
-                </a:lnTo>
-                <a:lnTo>
-                  <a:pt x="373608" y="8890"/>
-                </a:lnTo>
-                <a:lnTo>
-                  <a:pt x="344500" y="3810"/>
-                </a:lnTo>
-                <a:lnTo>
-                  <a:pt x="338086" y="3810"/>
-                </a:lnTo>
-                <a:lnTo>
-                  <a:pt x="325259" y="1270"/>
-                </a:lnTo>
-                <a:lnTo>
-                  <a:pt x="318795" y="1270"/>
-                </a:lnTo>
-                <a:lnTo>
-                  <a:pt x="312305" y="0"/>
-                </a:lnTo>
-                <a:lnTo>
-                  <a:pt x="249948" y="0"/>
-                </a:lnTo>
-                <a:lnTo>
-                  <a:pt x="235699" y="1270"/>
-                </a:lnTo>
-                <a:lnTo>
-                  <a:pt x="228612" y="2540"/>
-                </a:lnTo>
-                <a:lnTo>
-                  <a:pt x="221526" y="2540"/>
-                </a:lnTo>
-                <a:lnTo>
-                  <a:pt x="207987" y="5080"/>
-                </a:lnTo>
-                <a:lnTo>
-                  <a:pt x="201510" y="5080"/>
-                </a:lnTo>
-                <a:lnTo>
-                  <a:pt x="188607" y="7620"/>
-                </a:lnTo>
-                <a:lnTo>
-                  <a:pt x="172974" y="10160"/>
-                </a:lnTo>
-                <a:lnTo>
-                  <a:pt x="165176" y="12700"/>
-                </a:lnTo>
-                <a:lnTo>
-                  <a:pt x="157416" y="13970"/>
-                </a:lnTo>
-                <a:lnTo>
-                  <a:pt x="140246" y="17780"/>
-                </a:lnTo>
-                <a:lnTo>
-                  <a:pt x="123317" y="24130"/>
-                </a:lnTo>
-                <a:lnTo>
-                  <a:pt x="106641" y="29210"/>
-                </a:lnTo>
-                <a:lnTo>
-                  <a:pt x="90258" y="36830"/>
-                </a:lnTo>
-                <a:lnTo>
-                  <a:pt x="80835" y="40640"/>
-                </a:lnTo>
-                <a:lnTo>
-                  <a:pt x="71589" y="45720"/>
-                </a:lnTo>
-                <a:lnTo>
-                  <a:pt x="36728" y="69850"/>
-                </a:lnTo>
-                <a:lnTo>
-                  <a:pt x="15646" y="101600"/>
-                </a:lnTo>
-                <a:lnTo>
-                  <a:pt x="6972" y="146050"/>
-                </a:lnTo>
-                <a:lnTo>
-                  <a:pt x="3771" y="176530"/>
-                </a:lnTo>
-                <a:lnTo>
-                  <a:pt x="3238" y="182880"/>
-                </a:lnTo>
-                <a:lnTo>
-                  <a:pt x="2565" y="191770"/>
-                </a:lnTo>
-                <a:lnTo>
-                  <a:pt x="1968" y="199390"/>
-                </a:lnTo>
-                <a:lnTo>
-                  <a:pt x="1079" y="215900"/>
-                </a:lnTo>
-                <a:lnTo>
-                  <a:pt x="774" y="222250"/>
-                </a:lnTo>
-                <a:lnTo>
-                  <a:pt x="723" y="224790"/>
-                </a:lnTo>
-                <a:lnTo>
-                  <a:pt x="609" y="229870"/>
-                </a:lnTo>
-                <a:lnTo>
-                  <a:pt x="508" y="234950"/>
-                </a:lnTo>
-                <a:lnTo>
-                  <a:pt x="419" y="238760"/>
-                </a:lnTo>
-                <a:lnTo>
-                  <a:pt x="355" y="242570"/>
-                </a:lnTo>
-                <a:lnTo>
-                  <a:pt x="571" y="290830"/>
-                </a:lnTo>
-                <a:lnTo>
-                  <a:pt x="2070" y="331470"/>
-                </a:lnTo>
-                <a:lnTo>
-                  <a:pt x="6057" y="389890"/>
-                </a:lnTo>
-                <a:lnTo>
-                  <a:pt x="16941" y="430530"/>
-                </a:lnTo>
-                <a:lnTo>
-                  <a:pt x="44297" y="463550"/>
-                </a:lnTo>
-                <a:lnTo>
-                  <a:pt x="82397" y="488950"/>
-                </a:lnTo>
-                <a:lnTo>
-                  <a:pt x="96583" y="496570"/>
-                </a:lnTo>
-                <a:lnTo>
-                  <a:pt x="111099" y="501650"/>
-                </a:lnTo>
-                <a:lnTo>
-                  <a:pt x="125895" y="508000"/>
-                </a:lnTo>
-                <a:lnTo>
-                  <a:pt x="140881" y="511810"/>
-                </a:lnTo>
-                <a:lnTo>
-                  <a:pt x="152336" y="515620"/>
-                </a:lnTo>
-                <a:lnTo>
-                  <a:pt x="187172" y="523240"/>
-                </a:lnTo>
-                <a:lnTo>
-                  <a:pt x="219786" y="528320"/>
-                </a:lnTo>
-                <a:lnTo>
-                  <a:pt x="226542" y="529590"/>
-                </a:lnTo>
-                <a:lnTo>
-                  <a:pt x="233299" y="529590"/>
-                </a:lnTo>
-                <a:lnTo>
-                  <a:pt x="240080" y="530860"/>
-                </a:lnTo>
-                <a:lnTo>
-                  <a:pt x="246862" y="530860"/>
-                </a:lnTo>
-                <a:lnTo>
-                  <a:pt x="255282" y="532130"/>
-                </a:lnTo>
-                <a:lnTo>
-                  <a:pt x="272135" y="532130"/>
-                </a:lnTo>
-                <a:lnTo>
-                  <a:pt x="285559" y="533400"/>
-                </a:lnTo>
-                <a:lnTo>
-                  <a:pt x="298970" y="532130"/>
-                </a:lnTo>
-                <a:lnTo>
-                  <a:pt x="312369" y="532130"/>
-                </a:lnTo>
-                <a:lnTo>
-                  <a:pt x="325742" y="530860"/>
-                </a:lnTo>
-                <a:lnTo>
-                  <a:pt x="334124" y="529590"/>
-                </a:lnTo>
-                <a:lnTo>
-                  <a:pt x="342519" y="529590"/>
-                </a:lnTo>
-                <a:lnTo>
-                  <a:pt x="350837" y="528320"/>
-                </a:lnTo>
-                <a:lnTo>
-                  <a:pt x="394398" y="519430"/>
-                </a:lnTo>
-                <a:lnTo>
-                  <a:pt x="437845" y="505460"/>
-                </a:lnTo>
-                <a:lnTo>
-                  <a:pt x="454367" y="497840"/>
-                </a:lnTo>
-                <a:lnTo>
-                  <a:pt x="466750" y="492760"/>
-                </a:lnTo>
-                <a:lnTo>
-                  <a:pt x="478866" y="486410"/>
-                </a:lnTo>
-                <a:lnTo>
-                  <a:pt x="490740" y="478790"/>
-                </a:lnTo>
-                <a:lnTo>
-                  <a:pt x="499198" y="473710"/>
-                </a:lnTo>
-                <a:lnTo>
-                  <a:pt x="507238" y="467360"/>
-                </a:lnTo>
-                <a:lnTo>
-                  <a:pt x="514807" y="461010"/>
-                </a:lnTo>
-                <a:lnTo>
-                  <a:pt x="521893" y="453390"/>
-                </a:lnTo>
-                <a:lnTo>
-                  <a:pt x="528485" y="444500"/>
-                </a:lnTo>
-                <a:lnTo>
-                  <a:pt x="534200" y="436880"/>
-                </a:lnTo>
-                <a:lnTo>
-                  <a:pt x="548106" y="397510"/>
-                </a:lnTo>
-                <a:lnTo>
-                  <a:pt x="551129" y="356870"/>
-                </a:lnTo>
-                <a:lnTo>
-                  <a:pt x="551167" y="355600"/>
-                </a:lnTo>
-                <a:lnTo>
-                  <a:pt x="551434" y="346710"/>
-                </a:lnTo>
-                <a:lnTo>
-                  <a:pt x="552043" y="323850"/>
-                </a:lnTo>
-                <a:lnTo>
-                  <a:pt x="552145" y="318770"/>
-                </a:lnTo>
-                <a:lnTo>
-                  <a:pt x="552259" y="311150"/>
-                </a:lnTo>
-                <a:lnTo>
-                  <a:pt x="552348" y="260350"/>
-                </a:lnTo>
-                <a:close/>
-              </a:path>
-            </a:pathLst>
-          </a:custGeom>
-          <a:solidFill>
-            <a:srgbClr val="D50000"/>
-          </a:solidFill>
-        </p:spPr>
-        <p:txBody>
-          <a:bodyPr wrap="square" lIns="0" tIns="0" rIns="0" bIns="0" rtlCol="0"/>
-          <a:lstStyle/>
-          <a:p>
-            <a:endParaRPr/>
-          </a:p>
-        </p:txBody>
-      </p:sp>
-      <p:sp>
-        <p:nvSpPr>
-          <p:cNvPr id="7" name="object 7"/>
-          <p:cNvSpPr txBox="1"/>
-          <p:nvPr/>
-        </p:nvSpPr>
-        <p:spPr>
-          <a:xfrm>
-            <a:off x="1377949" y="635000"/>
-            <a:ext cx="1077595" cy="254000"/>
-          </a:xfrm>
-          <a:prstGeom prst="rect">
-            <a:avLst/>
-          </a:prstGeom>
-        </p:spPr>
-        <p:txBody>
-          <a:bodyPr vert="horz" wrap="square" lIns="0" tIns="12700" rIns="0" bIns="0" rtlCol="0">
-            <a:spAutoFit/>
-          </a:bodyPr>
-          <a:lstStyle/>
-          <a:p>
-            <a:pPr marL="12700">
-              <a:lnSpc>
-                <a:spcPct val="100000"/>
-              </a:lnSpc>
-              <a:spcBef>
-                <a:spcPts val="100"/>
-              </a:spcBef>
-            </a:pPr>
-            <a:r>
-              <a:rPr sz="1500" b="1" dirty="0">
-                <a:solidFill>
-                  <a:srgbClr val="FFFAF6"/>
-                </a:solidFill>
-                <a:latin typeface="Segoe UI"/>
-                <a:cs typeface="Segoe UI"/>
-              </a:rPr>
-              <a:t>Digital </a:t>
-            </a:r>
-            <a:r>
-              <a:rPr sz="1500" b="1" spc="-20" dirty="0">
-                <a:solidFill>
-                  <a:srgbClr val="FFFAF6"/>
-                </a:solidFill>
-                <a:latin typeface="Segoe UI"/>
-                <a:cs typeface="Segoe UI"/>
-              </a:rPr>
-              <a:t>Labs</a:t>
-            </a:r>
-            <a:endParaRPr sz="1500">
-              <a:latin typeface="Segoe UI"/>
-              <a:cs typeface="Segoe UI"/>
-            </a:endParaRPr>
-          </a:p>
-        </p:txBody>
-      </p:sp>
-      <p:sp>
-        <p:nvSpPr>
-          <p:cNvPr id="8" name="object 8"/>
-          <p:cNvSpPr txBox="1"/>
-          <p:nvPr/>
-        </p:nvSpPr>
-        <p:spPr>
-          <a:xfrm>
-            <a:off x="17036601" y="663575"/>
-            <a:ext cx="584200" cy="173990"/>
-          </a:xfrm>
-          <a:prstGeom prst="rect">
-            <a:avLst/>
-          </a:prstGeom>
-        </p:spPr>
-        <p:txBody>
-          <a:bodyPr vert="horz" wrap="square" lIns="0" tIns="15875" rIns="0" bIns="0" rtlCol="0">
-            <a:spAutoFit/>
-          </a:bodyPr>
-          <a:lstStyle/>
-          <a:p>
-            <a:pPr marL="12700">
-              <a:lnSpc>
-                <a:spcPct val="100000"/>
-              </a:lnSpc>
-              <a:spcBef>
-                <a:spcPts val="125"/>
-              </a:spcBef>
-            </a:pPr>
-            <a:r>
-              <a:rPr sz="950" b="1" spc="60" dirty="0">
-                <a:solidFill>
-                  <a:srgbClr val="FEFBF8"/>
-                </a:solidFill>
-                <a:latin typeface="Consolas"/>
-                <a:cs typeface="Consolas"/>
-              </a:rPr>
-              <a:t>17 / 17</a:t>
+              <a:t>08 / 16</a:t>
             </a:r>
             <a:r>
               <a:rPr sz="950" b="1" spc="229" dirty="0">
@@ -12607,7 +10133,7 @@
                 <a:latin typeface="Segoe UI"/>
                 <a:cs typeface="Segoe UI"/>
               </a:rPr>
-              <a:t>Resultado: espaços vetoriais incompatíveis em produção.</a:t>
+              <a:t>O resultado é simples: vetores indexados e vetores de consulta vivem em espaços distintos.</a:t>
             </a:r>
             <a:r>
               <a:rPr sz="2100" spc="-10" dirty="0">
@@ -13118,7 +10644,7 @@
             <p:nvPr/>
           </p:nvPicPr>
           <p:blipFill>
-            <a:blip r:embed="rId3" cstate="print"/>
+            <a:blip r:embed="rId2" cstate="print"/>
             <a:stretch>
               <a:fillRect/>
             </a:stretch>
@@ -13560,7 +11086,7 @@
                 <a:latin typeface="Segoe UI"/>
                 <a:cs typeface="Segoe UI"/>
               </a:rPr>
-              <a:t>fine_tuned_report_model — 768 dim. Fora do repositório.</a:t>
+              <a:t>fine_tuned_report_model — 768 dim, ativo do ml_wo, fora do repositório.</a:t>
             </a:r>
             <a:r>
               <a:rPr sz="1650" spc="-45" dirty="0">
@@ -14187,7 +11713,7 @@
             <p:nvPr/>
           </p:nvPicPr>
           <p:blipFill>
-            <a:blip r:embed="rId3" cstate="print"/>
+            <a:blip r:embed="rId2" cstate="print"/>
             <a:stretch>
               <a:fillRect/>
             </a:stretch>
@@ -14631,7 +12157,7 @@
                 <a:latin typeface="Segoe UI"/>
                 <a:cs typeface="Segoe UI"/>
               </a:rPr>
-              <a:t>Xenova/MPNet vanilla em ONNX — 768 dim. Aplicado em cada chamada.</a:t>
+              <a:t>Xenova/MPNet vanilla em ONNX no Node, 768 dim. Aplicado a cada consulta de produção.</a:t>
             </a:r>
             <a:r>
               <a:rPr sz="1650" spc="-35" dirty="0">
@@ -15258,7 +12784,7 @@
             <p:nvPr/>
           </p:nvPicPr>
           <p:blipFill>
-            <a:blip r:embed="rId3" cstate="print"/>
+            <a:blip r:embed="rId2" cstate="print"/>
             <a:stretch>
               <a:fillRect/>
             </a:stretch>
@@ -15683,7 +13209,7 @@
                 <a:latin typeface="Segoe UI"/>
                 <a:cs typeface="Segoe UI"/>
               </a:rPr>
-              <a:t>Recall degradado. Magnitude só será medida no bench neural.</a:t>
+              <a:t>O recall do retrieval atual está abaixo do potencial. A magnitude do impacto só será medida no bench neural.</a:t>
             </a:r>
             <a:r>
               <a:rPr sz="1650" spc="-10" dirty="0">
@@ -17100,7 +14626,7 @@
                 <a:latin typeface="Consolas"/>
                 <a:cs typeface="Consolas"/>
               </a:rPr>
-              <a:t>06 / 17</a:t>
+              <a:t>06 / 16</a:t>
             </a:r>
             <a:r>
               <a:rPr sz="950" b="1" spc="229" dirty="0">
@@ -17847,7 +15373,7 @@
                 <a:latin typeface="Segoe UI"/>
                 <a:cs typeface="Segoe UI"/>
               </a:rPr>
-              <a:t>1 query: 80–250 ms local · 60–180 ms OpenAI. LLM 4o-mini: 1,5–4 s por resposta.</a:t>
+              <a:t>Embedding de 1 query: 80–250 ms local ou 60–180 ms via OpenAI. LLM gpt-4o-mini: 1,5–4 s por resposta.</a:t>
             </a:r>
             <a:r>
               <a:rPr sz="1650" spc="-55" dirty="0">
@@ -18410,7 +15936,7 @@
                 <a:latin typeface="Consolas"/>
                 <a:cs typeface="Consolas"/>
               </a:rPr>
-              <a:t>Medido 2026-06-01</a:t>
+              <a:t>Bench 2026-06</a:t>
             </a:r>
             <a:r>
               <a:rPr sz="950" b="1" spc="215" dirty="0">
@@ -18634,7 +16160,7 @@
                 <a:latin typeface="Segoe UI"/>
                 <a:cs typeface="Segoe UI"/>
               </a:rPr>
-              <a:t>p50: 4,58 ms (78 docs) · 5,08 ms (7.943 docs). p99: 5,99 ms · 6,97 ms.</a:t>
+              <a:t>p50: 4,58 ms (78 docs) e 5,08 ms (7.943 docs). p99: 5,99 ms e 6,97 ms, respectivamente.</a:t>
             </a:r>
             <a:r>
               <a:rPr sz="1650" spc="-50" dirty="0">
@@ -20141,7 +17667,7 @@
                 <a:latin typeface="Consolas"/>
                 <a:cs typeface="Consolas"/>
               </a:rPr>
-              <a:t>11 / 17</a:t>
+              <a:t>11 / 16</a:t>
             </a:r>
             <a:r>
               <a:rPr sz="950" b="1" spc="229" dirty="0">
@@ -20859,7 +18385,7 @@
             <p:nvPr/>
           </p:nvPicPr>
           <p:blipFill>
-            <a:blip r:embed="rId3" cstate="print"/>
+            <a:blip r:embed="rId2" cstate="print"/>
             <a:stretch>
               <a:fillRect/>
             </a:stretch>
@@ -21314,7 +18840,7 @@
                 <a:latin typeface="Segoe UI"/>
                 <a:cs typeface="Segoe UI"/>
               </a:rPr>
-              <a:t>text-embedding-3-small @768. Xenova como fallback.</a:t>
+              <a:t>text-embedding-3-small @768 dim. Compatível com a coleção atual; Xenova como fallback.</a:t>
             </a:r>
             <a:r>
               <a:rPr sz="1650" spc="-50" dirty="0">
@@ -21921,7 +19447,7 @@
             <p:nvPr/>
           </p:nvPicPr>
           <p:blipFill>
-            <a:blip r:embed="rId3" cstate="print"/>
+            <a:blip r:embed="rId2" cstate="print"/>
             <a:stretch>
               <a:fillRect/>
             </a:stretch>
@@ -22385,7 +19911,7 @@
                 <a:latin typeface="Segoe UI"/>
                 <a:cs typeface="Segoe UI"/>
               </a:rPr>
-              <a:t>Chroma agora; pgvector no Postgres entra no roadmap.</a:t>
+              <a:t>Chroma local segue no curto prazo. pgvector no Postgres existente entra no roadmap.</a:t>
             </a:r>
             <a:r>
               <a:rPr sz="1650" spc="-55" dirty="0">
@@ -22952,7 +20478,7 @@
             <p:nvPr/>
           </p:nvPicPr>
           <p:blipFill>
-            <a:blip r:embed="rId3" cstate="print"/>
+            <a:blip r:embed="rId2" cstate="print"/>
             <a:stretch>
               <a:fillRect/>
             </a:stretch>
@@ -23416,7 +20942,7 @@
                 <a:latin typeface="Segoe UI"/>
                 <a:cs typeface="Segoe UI"/>
               </a:rPr>
-              <a:t>gpt-4o-mini baseline. Subir só com sinal de regressão.</a:t>
+              <a:t>gpt-4o-mini como baseline. Subir para gpt-4.1-mini somente com sinal de regressão.</a:t>
             </a:r>
             <a:r>
               <a:rPr sz="1650" spc="-80" dirty="0">
@@ -24803,7 +22329,7 @@
                 <a:latin typeface="Consolas"/>
                 <a:cs typeface="Consolas"/>
               </a:rPr>
-              <a:t>13 / 17</a:t>
+              <a:t>13 / 16</a:t>
             </a:r>
             <a:r>
               <a:rPr sz="950" b="1" spc="229" dirty="0">
@@ -25589,7 +23115,7 @@
             <p:nvPr/>
           </p:nvPicPr>
           <p:blipFill>
-            <a:blip r:embed="rId3" cstate="print"/>
+            <a:blip r:embed="rId2" cstate="print"/>
             <a:stretch>
               <a:fillRect/>
             </a:stretch>
@@ -26031,7 +23557,7 @@
                 <a:latin typeface="Segoe UI"/>
                 <a:cs typeface="Segoe UI"/>
               </a:rPr>
-              <a:t>MPNet, BGE-m3 e demais open source. Liberação pontual.</a:t>
+              <a:t>Necessário para baixar MPNet, BGE-m3 e demais open source.</a:t>
             </a:r>
             <a:r>
               <a:rPr sz="1650" spc="-45" dirty="0">
@@ -26658,7 +24184,7 @@
             <p:nvPr/>
           </p:nvPicPr>
           <p:blipFill>
-            <a:blip r:embed="rId3" cstate="print"/>
+            <a:blip r:embed="rId2" cstate="print"/>
             <a:stretch>
               <a:fillRect/>
             </a:stretch>
@@ -27102,7 +24628,7 @@
                 <a:latin typeface="Segoe UI"/>
                 <a:cs typeface="Segoe UI"/>
               </a:rPr>
-              <a:t>Embeddings v3 e LLM gerador. Liberação permanente, allowlist.</a:t>
+              <a:t>Necessário para embeddings v3 e para o LLM gerador. Liberação permanente com allowlist.</a:t>
             </a:r>
             <a:r>
               <a:rPr sz="1650" spc="-35" dirty="0">
@@ -27729,7 +25255,7 @@
             <p:nvPr/>
           </p:nvPicPr>
           <p:blipFill>
-            <a:blip r:embed="rId3" cstate="print"/>
+            <a:blip r:embed="rId2" cstate="print"/>
             <a:stretch>
               <a:fillRect/>
             </a:stretch>
@@ -28154,7 +25680,7 @@
                 <a:latin typeface="Segoe UI"/>
                 <a:cs typeface="Segoe UI"/>
               </a:rPr>
-              <a:t>Bench em estação pessoal. Scripts reproduzíveis em ~3 horas.</a:t>
+              <a:t>Rodar o bench numa estação pessoal com rede aberta. Scripts reproduzíveis em três horas.</a:t>
             </a:r>
             <a:r>
               <a:rPr sz="1650" spc="-10" dirty="0">
@@ -29571,7 +27097,7 @@
                 <a:latin typeface="Consolas"/>
                 <a:cs typeface="Consolas"/>
               </a:rPr>
-              <a:t>15 / 17</a:t>
+              <a:t>15 / 16</a:t>
             </a:r>
             <a:r>
               <a:rPr sz="950" b="1" spc="229" dirty="0">
@@ -32140,7 +29666,7 @@
                 <a:latin typeface="Consolas"/>
                 <a:cs typeface="Consolas"/>
               </a:rPr>
-              <a:t>16 / 17</a:t>
+              <a:t>16 / 16</a:t>
             </a:r>
             <a:r>
               <a:rPr sz="950" b="1" spc="229" dirty="0">
@@ -33013,7 +30539,7 @@
                           <a:latin typeface="Consolas"/>
                           <a:cs typeface="Consolas"/>
                         </a:rPr>
-                        <a:t>05	Bench parcial — resultados</a:t>
+                        <a:t>05	Bench parcial e proposta</a:t>
                       </a:r>
                       <a:r>
                         <a:rPr sz="1050" b="1" dirty="0">
@@ -33169,7 +30695,7 @@
                           <a:latin typeface="Segoe UI"/>
                           <a:cs typeface="Segoe UI"/>
                         </a:rPr>
-                        <a:t>Proposta e próximos passos</a:t>
+                        <a:t>Critérios e próximos passos</a:t>
                       </a:r>
                       <a:r>
                         <a:rPr sz="2100" b="1" spc="-65" dirty="0">
@@ -34534,7 +32060,7 @@
                 <a:latin typeface="Consolas"/>
                 <a:cs typeface="Consolas"/>
               </a:rPr>
-              <a:t>02 / 17</a:t>
+              <a:t>02 / 16</a:t>
             </a:r>
             <a:r>
               <a:rPr sz="950" b="1" spc="229" dirty="0">
@@ -35683,7 +33209,7 @@
                 <a:latin typeface="Segoe UI"/>
                 <a:cs typeface="Segoe UI"/>
               </a:rPr>
-              <a:t>Corpus de 8.021 chunks. Bug atual entre indexação e consulta. Embedding custa centavos; a decisão está no retrieval e no LLM gerador.</a:t>
+              <a:t>Corpus de 8.021 chunks: pequeno e técnico. Um bug entre indexação e consulta já degrada o retrieval hoje. O embedding custa centavos.</a:t>
             </a:r>
             <a:r>
               <a:rPr sz="2100" spc="-15" dirty="0">
@@ -37290,7 +34816,7 @@
                 <a:latin typeface="Consolas"/>
                 <a:cs typeface="Consolas"/>
               </a:rPr>
-              <a:t>03 / 17</a:t>
+              <a:t>03 / 16</a:t>
             </a:r>
             <a:r>
               <a:rPr sz="950" b="1" spc="229" dirty="0">
@@ -37580,7 +35106,7 @@
                 <a:latin typeface="Segoe UI"/>
                 <a:cs typeface="Segoe UI"/>
               </a:rPr>
-              <a:t>Direto do chroma.sqlite3 e do código do db-backend.</a:t>
+              <a:t>Levantados direto no chroma.sqlite3 e no código do db-backend.</a:t>
             </a:r>
             <a:r>
               <a:rPr sz="2100" spc="-10" dirty="0">
@@ -38533,7 +36059,7 @@
                 <a:latin typeface="Segoe UI"/>
                 <a:cs typeface="Segoe UI"/>
               </a:rPr>
-              <a:t>Indexação usa fine-tunado; consulta usa MPNet vanilla.</a:t>
+              <a:t>Indexação e consulta usam modelos diferentes; o recall sai degradado.</a:t>
             </a:r>
             <a:r>
               <a:rPr sz="1650" spc="-45" dirty="0">
@@ -39604,7 +37130,7 @@
                 <a:latin typeface="Segoe UI"/>
                 <a:cs typeface="Segoe UI"/>
               </a:rPr>
-              <a:t>78 laudos e 7.943 captions de metalografia. Chunk médio: 400 tokens.</a:t>
+              <a:t>78 laudos completos e 7.943 captions de metalografia. Chunk médio de 400 tokens, denso e técnico.</a:t>
             </a:r>
             <a:r>
               <a:rPr sz="1650" spc="-35" dirty="0">
@@ -40656,7 +38182,7 @@
                 <a:latin typeface="Segoe UI"/>
                 <a:cs typeface="Segoe UI"/>
               </a:rPr>
-              <a:t>Novos laudos precisam de pipeline assíncrono — ainda não desenhado.</a:t>
+              <a:t>Novos laudos precisam ser indexados de forma automática. O pipeline ainda não está desenhado.</a:t>
             </a:r>
             <a:r>
               <a:rPr sz="1650" spc="-10" dirty="0">
@@ -42073,7 +39599,7 @@
                 <a:latin typeface="Consolas"/>
                 <a:cs typeface="Consolas"/>
               </a:rPr>
-              <a:t>04 / 17</a:t>
+              <a:t>04 / 16</a:t>
             </a:r>
             <a:r>
               <a:rPr sz="950" b="1" spc="229" dirty="0">
@@ -42270,7 +39796,7 @@
                 <a:latin typeface="Georgia"/>
                 <a:cs typeface="Georgia"/>
               </a:rPr>
-              <a:t>Chroma local + fine-tunado interno.</a:t>
+              <a:t>Chroma + fine-tunado.</a:t>
             </a:r>
             <a:r>
               <a:rPr sz="5400" b="1" spc="-10" dirty="0">
@@ -42354,7 +39880,7 @@
                 <a:latin typeface="Segoe UI"/>
                 <a:cs typeface="Segoe UI"/>
               </a:rPr>
-              <a:t>NestJS via chromadb (JS). Index com fine-tunado (ml_wo); consultas com MPNet vanilla.</a:t>
+              <a:t>Backend NestJS consulta o Chroma via cliente JS. Os vetores foram indexados com modelo fine-tunado interno (ml_wo); as consultas em produção usam MPNet vanilla — origem do bug.</a:t>
             </a:r>
             <a:r>
               <a:rPr sz="2100" spc="-15" dirty="0">
@@ -45236,7 +42762,7 @@
                 <a:latin typeface="Consolas"/>
                 <a:cs typeface="Consolas"/>
               </a:rPr>
-              <a:t>05 / 17</a:t>
+              <a:t>05 / 16</a:t>
             </a:r>
             <a:r>
               <a:rPr sz="950" b="1" spc="229" dirty="0">
@@ -46424,7 +43950,7 @@
                 <a:latin typeface="Segoe UI"/>
                 <a:cs typeface="Segoe UI"/>
               </a:rPr>
-              <a:t>Reindex com vanilla. Chroma local. Corrige o bug sem migrar.</a:t>
+              <a:t>Reindexar com MPNet vanilla. Corrige o bug, mantém o Chroma local, sem dependência externa.</a:t>
             </a:r>
             <a:r>
               <a:rPr sz="1650" spc="-50" dirty="0">
@@ -47495,7 +45021,7 @@
                 <a:latin typeface="Segoe UI"/>
                 <a:cs typeface="Segoe UI"/>
               </a:rPr>
-              <a:t>text-embedding-3-small @768 via API. A/B sem refazer schema.</a:t>
+              <a:t>text-embedding-3-small @768 via API. A/B sem refazer schema; ganho de qualidade.</a:t>
             </a:r>
             <a:r>
               <a:rPr sz="1650" spc="-55" dirty="0">
@@ -48526,7 +46052,7 @@
                 <a:latin typeface="Segoe UI"/>
                 <a:cs typeface="Segoe UI"/>
               </a:rPr>
-              <a:t>OpenAI + pgvector no Postgres. Sem chroma-server Python.</a:t>
+              <a:t>OpenAI + pgvector no Postgres existente. Elimina o chroma-server Python da operação.</a:t>
             </a:r>
             <a:r>
               <a:rPr sz="1650" spc="-80" dirty="0">
@@ -49913,7 +47439,7 @@
                 <a:latin typeface="Consolas"/>
                 <a:cs typeface="Consolas"/>
               </a:rPr>
-              <a:t>09 / 17</a:t>
+              <a:t>09 / 16</a:t>
             </a:r>
             <a:r>
               <a:rPr sz="950" b="1" spc="229" dirty="0">
@@ -50282,7 +47808,7 @@
                 <a:latin typeface="Consolas"/>
                 <a:cs typeface="Consolas"/>
               </a:rPr>
-              <a:t>DPA · ZDR · MASCARAMENTO DE PII COMO PRÉ-CONDIÇÕES</a:t>
+              <a:t>DPA  ·  ZDR  ·  MASCARAMENTO DE PII COMO PRÉ-CONDIÇÕES</a:t>
             </a:r>
             <a:r>
               <a:rPr sz="1350" b="1" spc="270" dirty="0">
@@ -51679,7 +49205,7 @@
                 <a:latin typeface="Consolas"/>
                 <a:cs typeface="Consolas"/>
               </a:rPr>
-              <a:t>14 / 17</a:t>
+              <a:t>14 / 16</a:t>
             </a:r>
             <a:r>
               <a:rPr sz="950" b="1" spc="229" dirty="0">
@@ -53030,7 +50556,7 @@
                 <a:latin typeface="Segoe UI"/>
                 <a:cs typeface="Segoe UI"/>
               </a:rPr>
-              <a:t>Corpus completo: US$ 0,06 Standard · US$ 0,03 Batch.</a:t>
+              <a:t>Reindex completo do corpus: US$ 0,06 em Standard ou US$ 0,03 em Batch.</a:t>
             </a:r>
             <a:r>
               <a:rPr sz="1650" spc="-35" dirty="0">
@@ -54234,7 +51760,7 @@
                 <a:latin typeface="Segoe UI"/>
                 <a:cs typeface="Segoe UI"/>
               </a:rPr>
-              <a:t>US$ 0,0000006 por chamada. 100 k/mês = US$ 0,06.</a:t>
+              <a:t>Cerca de US$ 0,0000006 por chamada. 100 mil consultas/mês: US$ 0,06.</a:t>
             </a:r>
             <a:r>
               <a:rPr sz="1650" spc="-40" dirty="0">
@@ -55404,7 +52930,7 @@
                 <a:latin typeface="Segoe UI"/>
                 <a:cs typeface="Segoe UI"/>
               </a:rPr>
-              <a:t>US$ 0,0008 por resposta. 10 k/mês = US$ 8.</a:t>
+              <a:t>US$ 0,0008 por resposta (3 k entrada + 500 saída). 10 mil/mês: US$ 8. O custo real mora aqui.</a:t>
             </a:r>
             <a:r>
               <a:rPr sz="1650" spc="-55" dirty="0">
@@ -56771,7 +54297,7 @@
                 <a:latin typeface="Consolas"/>
                 <a:cs typeface="Consolas"/>
               </a:rPr>
-              <a:t>10 / 17</a:t>
+              <a:t>10 / 16</a:t>
             </a:r>
             <a:r>
               <a:rPr sz="950" b="1" spc="229" dirty="0">
@@ -56977,7 +54503,7 @@
                 <a:latin typeface="Segoe UI"/>
                 <a:cs typeface="Segoe UI"/>
               </a:rPr>
-              <a:t>Recall@5 do baseline TF-IDF — piso a superar.</a:t>
+              <a:t>Recall@5 do baseline TF-IDF — o piso a superar.</a:t>
             </a:r>
             <a:r>
               <a:rPr sz="2250" spc="-65" dirty="0">
@@ -57181,7 +54707,7 @@
                 <a:latin typeface="Segoe UI"/>
                 <a:cs typeface="Segoe UI"/>
               </a:rPr>
-              <a:t>234 consultas, 78 chunks.</a:t>
+              <a:t>234 consultas sintéticas contra 78 chunks.</a:t>
             </a:r>
             <a:r>
               <a:rPr sz="2250" spc="-45" dirty="0">
@@ -58498,7 +56024,7 @@
                 <a:latin typeface="Consolas"/>
                 <a:cs typeface="Consolas"/>
               </a:rPr>
-              <a:t>12 / 17</a:t>
+              <a:t>12 / 16</a:t>
             </a:r>
             <a:r>
               <a:rPr sz="950" b="1" spc="229" dirty="0">
